--- a/dossier-creation/export/ODev-Dossier-Creation.pptx
+++ b/dossier-creation/export/ODev-Dossier-Creation.pptx
@@ -13,9 +13,14 @@
     <p:sldId id="261" r:id="rId7"/>
     <p:sldId id="262" r:id="rId8"/>
     <p:sldId id="263" r:id="rId9"/>
+    <p:sldId id="264" r:id="rId10"/>
+    <p:sldId id="265" r:id="rId11"/>
+    <p:sldId id="266" r:id="rId12"/>
+    <p:sldId id="267" r:id="rId13"/>
+    <p:sldId id="268" r:id="rId14"/>
   </p:sldIdLst>
   <p:notesMasterIdLst>
-    <p:notesMasterId r:id="rId10"/>
+    <p:notesMasterId r:id="rId15"/>
   </p:notesMasterIdLst>
   <p:sldSz cx="12191695" cy="6858000"/>
   <p:notesSz cx="6858000" cy="12191695"/>
@@ -551,6 +556,358 @@
 </p:notes>
 </file>
 
+<file path=ppt/notesSlides/notesSlide10.xml><?xml version="1.0" encoding="utf-8"?>
+<p:notes xmlns:a="http://schemas.openxmlformats.org/drawingml/2006/main" xmlns:r="http://schemas.openxmlformats.org/officeDocument/2006/relationships" xmlns:p="http://schemas.openxmlformats.org/presentationml/2006/main">
+  <p:cSld>
+    <p:spTree>
+      <p:nvGrpSpPr>
+        <p:cNvPr id="1" name=""/>
+        <p:cNvGrpSpPr/>
+        <p:nvPr/>
+      </p:nvGrpSpPr>
+      <p:grpSpPr>
+        <a:xfrm>
+          <a:off x="0" y="0"/>
+          <a:ext cx="0" cy="0"/>
+          <a:chOff x="0" y="0"/>
+          <a:chExt cx="0" cy="0"/>
+        </a:xfrm>
+      </p:grpSpPr>
+      <p:sp>
+        <p:nvSpPr>
+          <p:cNvPr id="2" name="Slide Image Placeholder 1"/>
+          <p:cNvSpPr>
+            <a:spLocks noGrp="1" noRot="1" noChangeAspect="1"/>
+          </p:cNvSpPr>
+          <p:nvPr>
+            <p:ph type="sldImg"/>
+          </p:nvPr>
+        </p:nvSpPr>
+        <p:spPr/>
+      </p:sp>
+      <p:sp>
+        <p:nvSpPr>
+          <p:cNvPr id="3" name="Notes Placeholder 2"/>
+          <p:cNvSpPr>
+            <a:spLocks noGrp="1"/>
+          </p:cNvSpPr>
+          <p:nvPr>
+            <p:ph type="body" idx="1"/>
+          </p:nvPr>
+        </p:nvSpPr>
+        <p:spPr/>
+        <p:txBody>
+          <a:bodyPr/>
+          <a:lstStyle/>
+          <a:p>
+            <a:r>
+              <a:rPr lang="en-US" dirty="0"/>
+              <a:t/>
+            </a:r>
+            <a:endParaRPr lang="en-US" dirty="0"/>
+          </a:p>
+        </p:txBody>
+      </p:sp>
+      <p:sp>
+        <p:nvSpPr>
+          <p:cNvPr id="4" name="Slide Number Placeholder 3"/>
+          <p:cNvSpPr>
+            <a:spLocks noGrp="1"/>
+          </p:cNvSpPr>
+          <p:nvPr>
+            <p:ph type="sldNum" sz="quarter" idx="10"/>
+          </p:nvPr>
+        </p:nvSpPr>
+        <p:spPr/>
+        <p:txBody>
+          <a:bodyPr/>
+          <a:lstStyle/>
+          <a:p>
+            <a:fld id="{F7021451-1387-4CA6-816F-3879F97B5CBC}" type="slidenum">
+              <a:rPr lang="en-US"/>
+              <a:t>10</a:t>
+            </a:fld>
+            <a:endParaRPr lang="en-US"/>
+          </a:p>
+        </p:txBody>
+      </p:sp>
+    </p:spTree>
+    <p:extLst>
+      <p:ext uri="{BB962C8B-B14F-4D97-AF65-F5344CB8AC3E}">
+        <p14:creationId xmlns:p14="http://schemas.microsoft.com/office/powerpoint/2010/main" val="1024086991"/>
+      </p:ext>
+    </p:extLst>
+  </p:cSld>
+  <p:clrMapOvr>
+    <a:masterClrMapping/>
+  </p:clrMapOvr>
+</p:notes>
+</file>
+
+<file path=ppt/notesSlides/notesSlide11.xml><?xml version="1.0" encoding="utf-8"?>
+<p:notes xmlns:a="http://schemas.openxmlformats.org/drawingml/2006/main" xmlns:r="http://schemas.openxmlformats.org/officeDocument/2006/relationships" xmlns:p="http://schemas.openxmlformats.org/presentationml/2006/main">
+  <p:cSld>
+    <p:spTree>
+      <p:nvGrpSpPr>
+        <p:cNvPr id="1" name=""/>
+        <p:cNvGrpSpPr/>
+        <p:nvPr/>
+      </p:nvGrpSpPr>
+      <p:grpSpPr>
+        <a:xfrm>
+          <a:off x="0" y="0"/>
+          <a:ext cx="0" cy="0"/>
+          <a:chOff x="0" y="0"/>
+          <a:chExt cx="0" cy="0"/>
+        </a:xfrm>
+      </p:grpSpPr>
+      <p:sp>
+        <p:nvSpPr>
+          <p:cNvPr id="2" name="Slide Image Placeholder 1"/>
+          <p:cNvSpPr>
+            <a:spLocks noGrp="1" noRot="1" noChangeAspect="1"/>
+          </p:cNvSpPr>
+          <p:nvPr>
+            <p:ph type="sldImg"/>
+          </p:nvPr>
+        </p:nvSpPr>
+        <p:spPr/>
+      </p:sp>
+      <p:sp>
+        <p:nvSpPr>
+          <p:cNvPr id="3" name="Notes Placeholder 2"/>
+          <p:cNvSpPr>
+            <a:spLocks noGrp="1"/>
+          </p:cNvSpPr>
+          <p:nvPr>
+            <p:ph type="body" idx="1"/>
+          </p:nvPr>
+        </p:nvSpPr>
+        <p:spPr/>
+        <p:txBody>
+          <a:bodyPr/>
+          <a:lstStyle/>
+          <a:p>
+            <a:r>
+              <a:rPr lang="en-US" dirty="0"/>
+              <a:t/>
+            </a:r>
+            <a:endParaRPr lang="en-US" dirty="0"/>
+          </a:p>
+        </p:txBody>
+      </p:sp>
+      <p:sp>
+        <p:nvSpPr>
+          <p:cNvPr id="4" name="Slide Number Placeholder 3"/>
+          <p:cNvSpPr>
+            <a:spLocks noGrp="1"/>
+          </p:cNvSpPr>
+          <p:nvPr>
+            <p:ph type="sldNum" sz="quarter" idx="10"/>
+          </p:nvPr>
+        </p:nvSpPr>
+        <p:spPr/>
+        <p:txBody>
+          <a:bodyPr/>
+          <a:lstStyle/>
+          <a:p>
+            <a:fld id="{F7021451-1387-4CA6-816F-3879F97B5CBC}" type="slidenum">
+              <a:rPr lang="en-US"/>
+              <a:t>11</a:t>
+            </a:fld>
+            <a:endParaRPr lang="en-US"/>
+          </a:p>
+        </p:txBody>
+      </p:sp>
+    </p:spTree>
+    <p:extLst>
+      <p:ext uri="{BB962C8B-B14F-4D97-AF65-F5344CB8AC3E}">
+        <p14:creationId xmlns:p14="http://schemas.microsoft.com/office/powerpoint/2010/main" val="1024086991"/>
+      </p:ext>
+    </p:extLst>
+  </p:cSld>
+  <p:clrMapOvr>
+    <a:masterClrMapping/>
+  </p:clrMapOvr>
+</p:notes>
+</file>
+
+<file path=ppt/notesSlides/notesSlide12.xml><?xml version="1.0" encoding="utf-8"?>
+<p:notes xmlns:a="http://schemas.openxmlformats.org/drawingml/2006/main" xmlns:r="http://schemas.openxmlformats.org/officeDocument/2006/relationships" xmlns:p="http://schemas.openxmlformats.org/presentationml/2006/main">
+  <p:cSld>
+    <p:spTree>
+      <p:nvGrpSpPr>
+        <p:cNvPr id="1" name=""/>
+        <p:cNvGrpSpPr/>
+        <p:nvPr/>
+      </p:nvGrpSpPr>
+      <p:grpSpPr>
+        <a:xfrm>
+          <a:off x="0" y="0"/>
+          <a:ext cx="0" cy="0"/>
+          <a:chOff x="0" y="0"/>
+          <a:chExt cx="0" cy="0"/>
+        </a:xfrm>
+      </p:grpSpPr>
+      <p:sp>
+        <p:nvSpPr>
+          <p:cNvPr id="2" name="Slide Image Placeholder 1"/>
+          <p:cNvSpPr>
+            <a:spLocks noGrp="1" noRot="1" noChangeAspect="1"/>
+          </p:cNvSpPr>
+          <p:nvPr>
+            <p:ph type="sldImg"/>
+          </p:nvPr>
+        </p:nvSpPr>
+        <p:spPr/>
+      </p:sp>
+      <p:sp>
+        <p:nvSpPr>
+          <p:cNvPr id="3" name="Notes Placeholder 2"/>
+          <p:cNvSpPr>
+            <a:spLocks noGrp="1"/>
+          </p:cNvSpPr>
+          <p:nvPr>
+            <p:ph type="body" idx="1"/>
+          </p:nvPr>
+        </p:nvSpPr>
+        <p:spPr/>
+        <p:txBody>
+          <a:bodyPr/>
+          <a:lstStyle/>
+          <a:p>
+            <a:r>
+              <a:rPr lang="en-US" dirty="0"/>
+              <a:t/>
+            </a:r>
+            <a:endParaRPr lang="en-US" dirty="0"/>
+          </a:p>
+        </p:txBody>
+      </p:sp>
+      <p:sp>
+        <p:nvSpPr>
+          <p:cNvPr id="4" name="Slide Number Placeholder 3"/>
+          <p:cNvSpPr>
+            <a:spLocks noGrp="1"/>
+          </p:cNvSpPr>
+          <p:nvPr>
+            <p:ph type="sldNum" sz="quarter" idx="10"/>
+          </p:nvPr>
+        </p:nvSpPr>
+        <p:spPr/>
+        <p:txBody>
+          <a:bodyPr/>
+          <a:lstStyle/>
+          <a:p>
+            <a:fld id="{F7021451-1387-4CA6-816F-3879F97B5CBC}" type="slidenum">
+              <a:rPr lang="en-US"/>
+              <a:t>12</a:t>
+            </a:fld>
+            <a:endParaRPr lang="en-US"/>
+          </a:p>
+        </p:txBody>
+      </p:sp>
+    </p:spTree>
+    <p:extLst>
+      <p:ext uri="{BB962C8B-B14F-4D97-AF65-F5344CB8AC3E}">
+        <p14:creationId xmlns:p14="http://schemas.microsoft.com/office/powerpoint/2010/main" val="1024086991"/>
+      </p:ext>
+    </p:extLst>
+  </p:cSld>
+  <p:clrMapOvr>
+    <a:masterClrMapping/>
+  </p:clrMapOvr>
+</p:notes>
+</file>
+
+<file path=ppt/notesSlides/notesSlide13.xml><?xml version="1.0" encoding="utf-8"?>
+<p:notes xmlns:a="http://schemas.openxmlformats.org/drawingml/2006/main" xmlns:r="http://schemas.openxmlformats.org/officeDocument/2006/relationships" xmlns:p="http://schemas.openxmlformats.org/presentationml/2006/main">
+  <p:cSld>
+    <p:spTree>
+      <p:nvGrpSpPr>
+        <p:cNvPr id="1" name=""/>
+        <p:cNvGrpSpPr/>
+        <p:nvPr/>
+      </p:nvGrpSpPr>
+      <p:grpSpPr>
+        <a:xfrm>
+          <a:off x="0" y="0"/>
+          <a:ext cx="0" cy="0"/>
+          <a:chOff x="0" y="0"/>
+          <a:chExt cx="0" cy="0"/>
+        </a:xfrm>
+      </p:grpSpPr>
+      <p:sp>
+        <p:nvSpPr>
+          <p:cNvPr id="2" name="Slide Image Placeholder 1"/>
+          <p:cNvSpPr>
+            <a:spLocks noGrp="1" noRot="1" noChangeAspect="1"/>
+          </p:cNvSpPr>
+          <p:nvPr>
+            <p:ph type="sldImg"/>
+          </p:nvPr>
+        </p:nvSpPr>
+        <p:spPr/>
+      </p:sp>
+      <p:sp>
+        <p:nvSpPr>
+          <p:cNvPr id="3" name="Notes Placeholder 2"/>
+          <p:cNvSpPr>
+            <a:spLocks noGrp="1"/>
+          </p:cNvSpPr>
+          <p:nvPr>
+            <p:ph type="body" idx="1"/>
+          </p:nvPr>
+        </p:nvSpPr>
+        <p:spPr/>
+        <p:txBody>
+          <a:bodyPr/>
+          <a:lstStyle/>
+          <a:p>
+            <a:r>
+              <a:rPr lang="en-US" dirty="0"/>
+              <a:t/>
+            </a:r>
+            <a:endParaRPr lang="en-US" dirty="0"/>
+          </a:p>
+        </p:txBody>
+      </p:sp>
+      <p:sp>
+        <p:nvSpPr>
+          <p:cNvPr id="4" name="Slide Number Placeholder 3"/>
+          <p:cNvSpPr>
+            <a:spLocks noGrp="1"/>
+          </p:cNvSpPr>
+          <p:nvPr>
+            <p:ph type="sldNum" sz="quarter" idx="10"/>
+          </p:nvPr>
+        </p:nvSpPr>
+        <p:spPr/>
+        <p:txBody>
+          <a:bodyPr/>
+          <a:lstStyle/>
+          <a:p>
+            <a:fld id="{F7021451-1387-4CA6-816F-3879F97B5CBC}" type="slidenum">
+              <a:rPr lang="en-US"/>
+              <a:t>13</a:t>
+            </a:fld>
+            <a:endParaRPr lang="en-US"/>
+          </a:p>
+        </p:txBody>
+      </p:sp>
+    </p:spTree>
+    <p:extLst>
+      <p:ext uri="{BB962C8B-B14F-4D97-AF65-F5344CB8AC3E}">
+        <p14:creationId xmlns:p14="http://schemas.microsoft.com/office/powerpoint/2010/main" val="1024086991"/>
+      </p:ext>
+    </p:extLst>
+  </p:cSld>
+  <p:clrMapOvr>
+    <a:masterClrMapping/>
+  </p:clrMapOvr>
+</p:notes>
+</file>
+
 <file path=ppt/notesSlides/notesSlide2.xml><?xml version="1.0" encoding="utf-8"?>
 <p:notes xmlns:a="http://schemas.openxmlformats.org/drawingml/2006/main" xmlns:r="http://schemas.openxmlformats.org/officeDocument/2006/relationships" xmlns:p="http://schemas.openxmlformats.org/presentationml/2006/main">
   <p:cSld>
@@ -1149,6 +1506,94 @@
             <a:fld id="{F7021451-1387-4CA6-816F-3879F97B5CBC}" type="slidenum">
               <a:rPr lang="en-US"/>
               <a:t>8</a:t>
+            </a:fld>
+            <a:endParaRPr lang="en-US"/>
+          </a:p>
+        </p:txBody>
+      </p:sp>
+    </p:spTree>
+    <p:extLst>
+      <p:ext uri="{BB962C8B-B14F-4D97-AF65-F5344CB8AC3E}">
+        <p14:creationId xmlns:p14="http://schemas.microsoft.com/office/powerpoint/2010/main" val="1024086991"/>
+      </p:ext>
+    </p:extLst>
+  </p:cSld>
+  <p:clrMapOvr>
+    <a:masterClrMapping/>
+  </p:clrMapOvr>
+</p:notes>
+</file>
+
+<file path=ppt/notesSlides/notesSlide9.xml><?xml version="1.0" encoding="utf-8"?>
+<p:notes xmlns:a="http://schemas.openxmlformats.org/drawingml/2006/main" xmlns:r="http://schemas.openxmlformats.org/officeDocument/2006/relationships" xmlns:p="http://schemas.openxmlformats.org/presentationml/2006/main">
+  <p:cSld>
+    <p:spTree>
+      <p:nvGrpSpPr>
+        <p:cNvPr id="1" name=""/>
+        <p:cNvGrpSpPr/>
+        <p:nvPr/>
+      </p:nvGrpSpPr>
+      <p:grpSpPr>
+        <a:xfrm>
+          <a:off x="0" y="0"/>
+          <a:ext cx="0" cy="0"/>
+          <a:chOff x="0" y="0"/>
+          <a:chExt cx="0" cy="0"/>
+        </a:xfrm>
+      </p:grpSpPr>
+      <p:sp>
+        <p:nvSpPr>
+          <p:cNvPr id="2" name="Slide Image Placeholder 1"/>
+          <p:cNvSpPr>
+            <a:spLocks noGrp="1" noRot="1" noChangeAspect="1"/>
+          </p:cNvSpPr>
+          <p:nvPr>
+            <p:ph type="sldImg"/>
+          </p:nvPr>
+        </p:nvSpPr>
+        <p:spPr/>
+      </p:sp>
+      <p:sp>
+        <p:nvSpPr>
+          <p:cNvPr id="3" name="Notes Placeholder 2"/>
+          <p:cNvSpPr>
+            <a:spLocks noGrp="1"/>
+          </p:cNvSpPr>
+          <p:nvPr>
+            <p:ph type="body" idx="1"/>
+          </p:nvPr>
+        </p:nvSpPr>
+        <p:spPr/>
+        <p:txBody>
+          <a:bodyPr/>
+          <a:lstStyle/>
+          <a:p>
+            <a:r>
+              <a:rPr lang="en-US" dirty="0"/>
+              <a:t/>
+            </a:r>
+            <a:endParaRPr lang="en-US" dirty="0"/>
+          </a:p>
+        </p:txBody>
+      </p:sp>
+      <p:sp>
+        <p:nvSpPr>
+          <p:cNvPr id="4" name="Slide Number Placeholder 3"/>
+          <p:cNvSpPr>
+            <a:spLocks noGrp="1"/>
+          </p:cNvSpPr>
+          <p:nvPr>
+            <p:ph type="sldNum" sz="quarter" idx="10"/>
+          </p:nvPr>
+        </p:nvSpPr>
+        <p:spPr/>
+        <p:txBody>
+          <a:bodyPr/>
+          <a:lstStyle/>
+          <a:p>
+            <a:fld id="{F7021451-1387-4CA6-816F-3879F97B5CBC}" type="slidenum">
+              <a:rPr lang="en-US"/>
+              <a:t>9</a:t>
             </a:fld>
             <a:endParaRPr lang="en-US"/>
           </a:p>
@@ -1764,6 +2209,2573 @@
 </p:sld>
 </file>
 
+<file path=ppt/slides/slide10.xml><?xml version="1.0" encoding="utf-8"?>
+<p:sld xmlns:a="http://schemas.openxmlformats.org/drawingml/2006/main" xmlns:r="http://schemas.openxmlformats.org/officeDocument/2006/relationships" xmlns:p="http://schemas.openxmlformats.org/presentationml/2006/main">
+  <p:cSld name="Slide 10">
+    <p:spTree>
+      <p:nvGrpSpPr>
+        <p:cNvPr id="1" name=""/>
+        <p:cNvGrpSpPr/>
+        <p:nvPr/>
+      </p:nvGrpSpPr>
+      <p:grpSpPr>
+        <a:xfrm>
+          <a:off x="0" y="0"/>
+          <a:ext cx="0" cy="0"/>
+          <a:chOff x="0" y="0"/>
+          <a:chExt cx="0" cy="0"/>
+        </a:xfrm>
+      </p:grpSpPr>
+      <p:sp>
+        <p:nvSpPr>
+          <p:cNvPr id="2" name="Shape 0"/>
+          <p:cNvSpPr/>
+          <p:nvPr/>
+        </p:nvSpPr>
+        <p:spPr>
+          <a:xfrm>
+            <a:off x="0" y="0"/>
+            <a:ext cx="12191695" cy="6858000"/>
+          </a:xfrm>
+          <a:prstGeom prst="rect">
+            <a:avLst/>
+          </a:prstGeom>
+          <a:solidFill>
+            <a:srgbClr val="D6DAE2"/>
+          </a:solidFill>
+          <a:ln/>
+        </p:spPr>
+      </p:sp>
+      <p:sp>
+        <p:nvSpPr>
+          <p:cNvPr id="3" name="Text 1"/>
+          <p:cNvSpPr/>
+          <p:nvPr/>
+        </p:nvSpPr>
+        <p:spPr>
+          <a:xfrm>
+            <a:off x="640080" y="411480"/>
+            <a:ext cx="10972800" cy="274320"/>
+          </a:xfrm>
+          <a:prstGeom prst="rect">
+            <a:avLst/>
+          </a:prstGeom>
+          <a:noFill/>
+          <a:ln/>
+        </p:spPr>
+        <p:txBody>
+          <a:bodyPr wrap="square" rtlCol="0" anchor="ctr"/>
+          <a:lstStyle/>
+          <a:p>
+            <a:pPr indent="0" marL="0">
+              <a:buNone/>
+            </a:pPr>
+            <a:r>
+              <a:rPr lang="en-US" sz="1100" b="1" spc="400" kern="0" dirty="0">
+                <a:solidFill>
+                  <a:srgbClr val="E63312"/>
+                </a:solidFill>
+                <a:latin typeface="Arial" pitchFamily="34" charset="0"/>
+                <a:ea typeface="Arial" pitchFamily="34" charset="-122"/>
+                <a:cs typeface="Arial" pitchFamily="34" charset="-120"/>
+              </a:rPr>
+              <a:t>04 — PORTFOLIO EN LIGNE</a:t>
+            </a:r>
+            <a:endParaRPr lang="en-US" sz="1100" dirty="0"/>
+          </a:p>
+        </p:txBody>
+      </p:sp>
+      <p:sp>
+        <p:nvSpPr>
+          <p:cNvPr id="4" name="Text 2"/>
+          <p:cNvSpPr/>
+          <p:nvPr/>
+        </p:nvSpPr>
+        <p:spPr>
+          <a:xfrm>
+            <a:off x="640080" y="777240"/>
+            <a:ext cx="10972800" cy="457200"/>
+          </a:xfrm>
+          <a:prstGeom prst="rect">
+            <a:avLst/>
+          </a:prstGeom>
+          <a:noFill/>
+          <a:ln/>
+        </p:spPr>
+        <p:txBody>
+          <a:bodyPr wrap="square" rtlCol="0" anchor="ctr"/>
+          <a:lstStyle/>
+          <a:p>
+            <a:pPr indent="0" marL="0">
+              <a:buNone/>
+            </a:pPr>
+            <a:r>
+              <a:rPr lang="en-US" sz="3200" b="1" dirty="0">
+                <a:solidFill>
+                  <a:srgbClr val="12151C"/>
+                </a:solidFill>
+                <a:latin typeface="Arial" pitchFamily="34" charset="0"/>
+                <a:ea typeface="Arial" pitchFamily="34" charset="-122"/>
+                <a:cs typeface="Arial" pitchFamily="34" charset="-120"/>
+              </a:rPr>
+              <a:t>Liens des réalisations</a:t>
+            </a:r>
+            <a:endParaRPr lang="en-US" sz="3200" dirty="0"/>
+          </a:p>
+        </p:txBody>
+      </p:sp>
+      <p:sp>
+        <p:nvSpPr>
+          <p:cNvPr id="5" name="Shape 3"/>
+          <p:cNvSpPr/>
+          <p:nvPr/>
+        </p:nvSpPr>
+        <p:spPr>
+          <a:xfrm>
+            <a:off x="640080" y="1554480"/>
+            <a:ext cx="10972800" cy="1188720"/>
+          </a:xfrm>
+          <a:prstGeom prst="rect">
+            <a:avLst/>
+          </a:prstGeom>
+          <a:solidFill>
+            <a:srgbClr val="FFFFFF"/>
+          </a:solidFill>
+          <a:ln w="12700">
+            <a:solidFill>
+              <a:srgbClr val="C8CED8"/>
+            </a:solidFill>
+            <a:prstDash val="solid"/>
+          </a:ln>
+        </p:spPr>
+      </p:sp>
+      <p:pic>
+        <p:nvPicPr>
+          <p:cNvPr id="6" name="Image 0" descr="C:\Users\samyd\Desktop\GTA RP\ODev\dossier-creation\assets\img\odev.png">    </p:cNvPr>
+          <p:cNvPicPr>
+            <a:picLocks noChangeAspect="1"/>
+          </p:cNvPicPr>
+          <p:nvPr/>
+        </p:nvPicPr>
+        <p:blipFill>
+          <a:blip r:embed="rId1"/>
+          <a:stretch>
+            <a:fillRect/>
+          </a:stretch>
+        </p:blipFill>
+        <p:spPr>
+          <a:xfrm>
+            <a:off x="822960" y="1691640"/>
+            <a:ext cx="1828800" cy="914400"/>
+          </a:xfrm>
+          <a:prstGeom prst="rect">
+            <a:avLst/>
+          </a:prstGeom>
+        </p:spPr>
+      </p:pic>
+      <p:sp>
+        <p:nvSpPr>
+          <p:cNvPr id="7" name="Text 4"/>
+          <p:cNvSpPr/>
+          <p:nvPr/>
+        </p:nvSpPr>
+        <p:spPr>
+          <a:xfrm>
+            <a:off x="2926080" y="1783080"/>
+            <a:ext cx="7315200" cy="320040"/>
+          </a:xfrm>
+          <a:prstGeom prst="rect">
+            <a:avLst/>
+          </a:prstGeom>
+          <a:noFill/>
+          <a:ln/>
+        </p:spPr>
+        <p:txBody>
+          <a:bodyPr wrap="square" rtlCol="0" anchor="ctr"/>
+          <a:lstStyle/>
+          <a:p>
+            <a:pPr indent="0" marL="0">
+              <a:buNone/>
+            </a:pPr>
+            <a:r>
+              <a:rPr lang="en-US" sz="1800" b="1" dirty="0">
+                <a:solidFill>
+                  <a:srgbClr val="12151C"/>
+                </a:solidFill>
+                <a:latin typeface="Arial" pitchFamily="34" charset="0"/>
+                <a:ea typeface="Arial" pitchFamily="34" charset="-122"/>
+                <a:cs typeface="Arial" pitchFamily="34" charset="-120"/>
+              </a:rPr>
+              <a:t>ODev Studio</a:t>
+            </a:r>
+            <a:endParaRPr lang="en-US" sz="1800" dirty="0"/>
+          </a:p>
+        </p:txBody>
+      </p:sp>
+      <p:sp>
+        <p:nvSpPr>
+          <p:cNvPr id="8" name="Text 5"/>
+          <p:cNvSpPr/>
+          <p:nvPr/>
+        </p:nvSpPr>
+        <p:spPr>
+          <a:xfrm>
+            <a:off x="2926080" y="2057400"/>
+            <a:ext cx="7315200" cy="228600"/>
+          </a:xfrm>
+          <a:prstGeom prst="rect">
+            <a:avLst/>
+          </a:prstGeom>
+          <a:noFill/>
+          <a:ln/>
+        </p:spPr>
+        <p:txBody>
+          <a:bodyPr wrap="square" rtlCol="0" anchor="ctr"/>
+          <a:lstStyle/>
+          <a:p>
+            <a:pPr indent="0" marL="0">
+              <a:buNone/>
+            </a:pPr>
+            <a:r>
+              <a:rPr lang="en-US" sz="1200" dirty="0">
+                <a:solidFill>
+                  <a:srgbClr val="2A303C"/>
+                </a:solidFill>
+                <a:latin typeface="Arial" pitchFamily="34" charset="0"/>
+                <a:ea typeface="Arial" pitchFamily="34" charset="-122"/>
+                <a:cs typeface="Arial" pitchFamily="34" charset="-120"/>
+              </a:rPr>
+              <a:t>Site vitrine studio</a:t>
+            </a:r>
+            <a:endParaRPr lang="en-US" sz="1200" dirty="0"/>
+          </a:p>
+        </p:txBody>
+      </p:sp>
+      <p:sp>
+        <p:nvSpPr>
+          <p:cNvPr id="9" name="Text 6">
+            <a:hlinkClick r:id="rId2" tooltip=""/>
+          </p:cNvPr>
+          <p:cNvSpPr/>
+          <p:nvPr/>
+        </p:nvSpPr>
+        <p:spPr>
+          <a:xfrm>
+            <a:off x="2926080" y="2331720"/>
+            <a:ext cx="8229600" cy="274320"/>
+          </a:xfrm>
+          <a:prstGeom prst="rect">
+            <a:avLst/>
+          </a:prstGeom>
+          <a:noFill/>
+          <a:ln/>
+        </p:spPr>
+        <p:txBody>
+          <a:bodyPr wrap="square" rtlCol="0" anchor="ctr"/>
+          <a:lstStyle/>
+          <a:p>
+            <a:pPr indent="0" marL="0">
+              <a:buNone/>
+            </a:pPr>
+            <a:r>
+              <a:rPr lang="en-US" sz="1300" b="1" u="sng" dirty="0">
+                <a:solidFill>
+                  <a:srgbClr val="E63312"/>
+                </a:solidFill>
+                <a:latin typeface="Arial" pitchFamily="34" charset="0"/>
+                <a:ea typeface="Arial" pitchFamily="34" charset="-122"/>
+                <a:cs typeface="Arial" pitchFamily="34" charset="-120"/>
+                <a:hlinkClick r:id="rId2" invalidUrl="" action="" tgtFrame="" tooltip="" history="1" highlightClick="0" endSnd="0">
+                  <a:extLst>
+                    <a:ext uri="{A12FA001-AC4F-418D-AE19-62706E023703}">
+                      <ahyp:hlinkClr xmlns:ahyp="http://schemas.microsoft.com/office/drawing/2018/hyperlinkcolor" val="tx"/>
+                    </a:ext>
+                  </a:extLst>
+                </a:hlinkClick>
+              </a:rPr>
+              <a:t>https://odev.kodyalabs.fr/</a:t>
+            </a:r>
+            <a:endParaRPr lang="en-US" sz="1300" dirty="0"/>
+          </a:p>
+        </p:txBody>
+      </p:sp>
+      <p:sp>
+        <p:nvSpPr>
+          <p:cNvPr id="10" name="Shape 7"/>
+          <p:cNvSpPr/>
+          <p:nvPr/>
+        </p:nvSpPr>
+        <p:spPr>
+          <a:xfrm>
+            <a:off x="640080" y="2926080"/>
+            <a:ext cx="10972800" cy="1188720"/>
+          </a:xfrm>
+          <a:prstGeom prst="rect">
+            <a:avLst/>
+          </a:prstGeom>
+          <a:solidFill>
+            <a:srgbClr val="FFFFFF"/>
+          </a:solidFill>
+          <a:ln w="12700">
+            <a:solidFill>
+              <a:srgbClr val="C8CED8"/>
+            </a:solidFill>
+            <a:prstDash val="solid"/>
+          </a:ln>
+        </p:spPr>
+      </p:sp>
+      <p:pic>
+        <p:nvPicPr>
+          <p:cNvPr id="11" name="Image 1" descr="C:\Users\samyd\Desktop\GTA RP\ODev\dossier-creation\assets\img\dynasty8.png">    </p:cNvPr>
+          <p:cNvPicPr>
+            <a:picLocks noChangeAspect="1"/>
+          </p:cNvPicPr>
+          <p:nvPr/>
+        </p:nvPicPr>
+        <p:blipFill>
+          <a:blip r:embed="rId3"/>
+          <a:stretch>
+            <a:fillRect/>
+          </a:stretch>
+        </p:blipFill>
+        <p:spPr>
+          <a:xfrm>
+            <a:off x="822960" y="3063240"/>
+            <a:ext cx="1828800" cy="914400"/>
+          </a:xfrm>
+          <a:prstGeom prst="rect">
+            <a:avLst/>
+          </a:prstGeom>
+        </p:spPr>
+      </p:pic>
+      <p:sp>
+        <p:nvSpPr>
+          <p:cNvPr id="12" name="Text 8"/>
+          <p:cNvSpPr/>
+          <p:nvPr/>
+        </p:nvSpPr>
+        <p:spPr>
+          <a:xfrm>
+            <a:off x="2926080" y="3154680"/>
+            <a:ext cx="7315200" cy="320040"/>
+          </a:xfrm>
+          <a:prstGeom prst="rect">
+            <a:avLst/>
+          </a:prstGeom>
+          <a:noFill/>
+          <a:ln/>
+        </p:spPr>
+        <p:txBody>
+          <a:bodyPr wrap="square" rtlCol="0" anchor="ctr"/>
+          <a:lstStyle/>
+          <a:p>
+            <a:pPr indent="0" marL="0">
+              <a:buNone/>
+            </a:pPr>
+            <a:r>
+              <a:rPr lang="en-US" sz="1800" b="1" dirty="0">
+                <a:solidFill>
+                  <a:srgbClr val="12151C"/>
+                </a:solidFill>
+                <a:latin typeface="Arial" pitchFamily="34" charset="0"/>
+                <a:ea typeface="Arial" pitchFamily="34" charset="-122"/>
+                <a:cs typeface="Arial" pitchFamily="34" charset="-120"/>
+              </a:rPr>
+              <a:t>Dynasty8</a:t>
+            </a:r>
+            <a:endParaRPr lang="en-US" sz="1800" dirty="0"/>
+          </a:p>
+        </p:txBody>
+      </p:sp>
+      <p:sp>
+        <p:nvSpPr>
+          <p:cNvPr id="13" name="Text 9"/>
+          <p:cNvSpPr/>
+          <p:nvPr/>
+        </p:nvSpPr>
+        <p:spPr>
+          <a:xfrm>
+            <a:off x="2926080" y="3429000"/>
+            <a:ext cx="7315200" cy="228600"/>
+          </a:xfrm>
+          <a:prstGeom prst="rect">
+            <a:avLst/>
+          </a:prstGeom>
+          <a:noFill/>
+          <a:ln/>
+        </p:spPr>
+        <p:txBody>
+          <a:bodyPr wrap="square" rtlCol="0" anchor="ctr"/>
+          <a:lstStyle/>
+          <a:p>
+            <a:pPr indent="0" marL="0">
+              <a:buNone/>
+            </a:pPr>
+            <a:r>
+              <a:rPr lang="en-US" sz="1200" dirty="0">
+                <a:solidFill>
+                  <a:srgbClr val="2A303C"/>
+                </a:solidFill>
+                <a:latin typeface="Arial" pitchFamily="34" charset="0"/>
+                <a:ea typeface="Arial" pitchFamily="34" charset="-122"/>
+                <a:cs typeface="Arial" pitchFamily="34" charset="-120"/>
+              </a:rPr>
+              <a:t>Plateforme immobilière</a:t>
+            </a:r>
+            <a:endParaRPr lang="en-US" sz="1200" dirty="0"/>
+          </a:p>
+        </p:txBody>
+      </p:sp>
+      <p:sp>
+        <p:nvSpPr>
+          <p:cNvPr id="14" name="Text 10">
+            <a:hlinkClick r:id="rId4" tooltip=""/>
+          </p:cNvPr>
+          <p:cNvSpPr/>
+          <p:nvPr/>
+        </p:nvSpPr>
+        <p:spPr>
+          <a:xfrm>
+            <a:off x="2926080" y="3703320"/>
+            <a:ext cx="8229600" cy="274320"/>
+          </a:xfrm>
+          <a:prstGeom prst="rect">
+            <a:avLst/>
+          </a:prstGeom>
+          <a:noFill/>
+          <a:ln/>
+        </p:spPr>
+        <p:txBody>
+          <a:bodyPr wrap="square" rtlCol="0" anchor="ctr"/>
+          <a:lstStyle/>
+          <a:p>
+            <a:pPr indent="0" marL="0">
+              <a:buNone/>
+            </a:pPr>
+            <a:r>
+              <a:rPr lang="en-US" sz="1300" b="1" u="sng" dirty="0">
+                <a:solidFill>
+                  <a:srgbClr val="E63312"/>
+                </a:solidFill>
+                <a:latin typeface="Arial" pitchFamily="34" charset="0"/>
+                <a:ea typeface="Arial" pitchFamily="34" charset="-122"/>
+                <a:cs typeface="Arial" pitchFamily="34" charset="-120"/>
+                <a:hlinkClick r:id="rId4" invalidUrl="" action="" tgtFrame="" tooltip="" history="1" highlightClick="0" endSnd="0">
+                  <a:extLst>
+                    <a:ext uri="{A12FA001-AC4F-418D-AE19-62706E023703}">
+                      <ahyp:hlinkClr xmlns:ahyp="http://schemas.microsoft.com/office/drawing/2018/hyperlinkcolor" val="tx"/>
+                    </a:ext>
+                  </a:extLst>
+                </a:hlinkClick>
+              </a:rPr>
+              <a:t>https://dynasty8.kodyalabs.fr/</a:t>
+            </a:r>
+            <a:endParaRPr lang="en-US" sz="1300" dirty="0"/>
+          </a:p>
+        </p:txBody>
+      </p:sp>
+      <p:sp>
+        <p:nvSpPr>
+          <p:cNvPr id="15" name="Shape 11"/>
+          <p:cNvSpPr/>
+          <p:nvPr/>
+        </p:nvSpPr>
+        <p:spPr>
+          <a:xfrm>
+            <a:off x="640080" y="4297680"/>
+            <a:ext cx="10972800" cy="1188720"/>
+          </a:xfrm>
+          <a:prstGeom prst="rect">
+            <a:avLst/>
+          </a:prstGeom>
+          <a:solidFill>
+            <a:srgbClr val="FFFFFF"/>
+          </a:solidFill>
+          <a:ln w="12700">
+            <a:solidFill>
+              <a:srgbClr val="C8CED8"/>
+            </a:solidFill>
+            <a:prstDash val="solid"/>
+          </a:ln>
+        </p:spPr>
+      </p:sp>
+      <p:pic>
+        <p:nvPicPr>
+          <p:cNvPr id="16" name="Image 2" descr="C:\Users\samyd\Desktop\GTA RP\ODev\dossier-creation\assets\img\cabinet-valet.png">    </p:cNvPr>
+          <p:cNvPicPr>
+            <a:picLocks noChangeAspect="1"/>
+          </p:cNvPicPr>
+          <p:nvPr/>
+        </p:nvPicPr>
+        <p:blipFill>
+          <a:blip r:embed="rId5"/>
+          <a:stretch>
+            <a:fillRect/>
+          </a:stretch>
+        </p:blipFill>
+        <p:spPr>
+          <a:xfrm>
+            <a:off x="822960" y="4434840"/>
+            <a:ext cx="1828800" cy="914400"/>
+          </a:xfrm>
+          <a:prstGeom prst="rect">
+            <a:avLst/>
+          </a:prstGeom>
+        </p:spPr>
+      </p:pic>
+      <p:sp>
+        <p:nvSpPr>
+          <p:cNvPr id="17" name="Text 12"/>
+          <p:cNvSpPr/>
+          <p:nvPr/>
+        </p:nvSpPr>
+        <p:spPr>
+          <a:xfrm>
+            <a:off x="2926080" y="4526280"/>
+            <a:ext cx="7315200" cy="320040"/>
+          </a:xfrm>
+          <a:prstGeom prst="rect">
+            <a:avLst/>
+          </a:prstGeom>
+          <a:noFill/>
+          <a:ln/>
+        </p:spPr>
+        <p:txBody>
+          <a:bodyPr wrap="square" rtlCol="0" anchor="ctr"/>
+          <a:lstStyle/>
+          <a:p>
+            <a:pPr indent="0" marL="0">
+              <a:buNone/>
+            </a:pPr>
+            <a:r>
+              <a:rPr lang="en-US" sz="1800" b="1" dirty="0">
+                <a:solidFill>
+                  <a:srgbClr val="12151C"/>
+                </a:solidFill>
+                <a:latin typeface="Arial" pitchFamily="34" charset="0"/>
+                <a:ea typeface="Arial" pitchFamily="34" charset="-122"/>
+                <a:cs typeface="Arial" pitchFamily="34" charset="-120"/>
+              </a:rPr>
+              <a:t>Cabinet Valet</a:t>
+            </a:r>
+            <a:endParaRPr lang="en-US" sz="1800" dirty="0"/>
+          </a:p>
+        </p:txBody>
+      </p:sp>
+      <p:sp>
+        <p:nvSpPr>
+          <p:cNvPr id="18" name="Text 13"/>
+          <p:cNvSpPr/>
+          <p:nvPr/>
+        </p:nvSpPr>
+        <p:spPr>
+          <a:xfrm>
+            <a:off x="2926080" y="4800600"/>
+            <a:ext cx="7315200" cy="228600"/>
+          </a:xfrm>
+          <a:prstGeom prst="rect">
+            <a:avLst/>
+          </a:prstGeom>
+          <a:noFill/>
+          <a:ln/>
+        </p:spPr>
+        <p:txBody>
+          <a:bodyPr wrap="square" rtlCol="0" anchor="ctr"/>
+          <a:lstStyle/>
+          <a:p>
+            <a:pPr indent="0" marL="0">
+              <a:buNone/>
+            </a:pPr>
+            <a:r>
+              <a:rPr lang="en-US" sz="1200" dirty="0">
+                <a:solidFill>
+                  <a:srgbClr val="2A303C"/>
+                </a:solidFill>
+                <a:latin typeface="Arial" pitchFamily="34" charset="0"/>
+                <a:ea typeface="Arial" pitchFamily="34" charset="-122"/>
+                <a:cs typeface="Arial" pitchFamily="34" charset="-120"/>
+              </a:rPr>
+              <a:t>Site cabinet professionnel</a:t>
+            </a:r>
+            <a:endParaRPr lang="en-US" sz="1200" dirty="0"/>
+          </a:p>
+        </p:txBody>
+      </p:sp>
+      <p:sp>
+        <p:nvSpPr>
+          <p:cNvPr id="19" name="Text 14">
+            <a:hlinkClick r:id="rId6" tooltip=""/>
+          </p:cNvPr>
+          <p:cNvSpPr/>
+          <p:nvPr/>
+        </p:nvSpPr>
+        <p:spPr>
+          <a:xfrm>
+            <a:off x="2926080" y="5074920"/>
+            <a:ext cx="8229600" cy="274320"/>
+          </a:xfrm>
+          <a:prstGeom prst="rect">
+            <a:avLst/>
+          </a:prstGeom>
+          <a:noFill/>
+          <a:ln/>
+        </p:spPr>
+        <p:txBody>
+          <a:bodyPr wrap="square" rtlCol="0" anchor="ctr"/>
+          <a:lstStyle/>
+          <a:p>
+            <a:pPr indent="0" marL="0">
+              <a:buNone/>
+            </a:pPr>
+            <a:r>
+              <a:rPr lang="en-US" sz="1300" b="1" u="sng" dirty="0">
+                <a:solidFill>
+                  <a:srgbClr val="E63312"/>
+                </a:solidFill>
+                <a:latin typeface="Arial" pitchFamily="34" charset="0"/>
+                <a:ea typeface="Arial" pitchFamily="34" charset="-122"/>
+                <a:cs typeface="Arial" pitchFamily="34" charset="-120"/>
+                <a:hlinkClick r:id="rId6" invalidUrl="" action="" tgtFrame="" tooltip="" history="1" highlightClick="0" endSnd="0">
+                  <a:extLst>
+                    <a:ext uri="{A12FA001-AC4F-418D-AE19-62706E023703}">
+                      <ahyp:hlinkClr xmlns:ahyp="http://schemas.microsoft.com/office/drawing/2018/hyperlinkcolor" val="tx"/>
+                    </a:ext>
+                  </a:extLst>
+                </a:hlinkClick>
+              </a:rPr>
+              <a:t>https://cabinet-valet.kodyalabs.fr/</a:t>
+            </a:r>
+            <a:endParaRPr lang="en-US" sz="1300" dirty="0"/>
+          </a:p>
+        </p:txBody>
+      </p:sp>
+      <p:sp>
+        <p:nvSpPr>
+          <p:cNvPr id="20" name="Text 15"/>
+          <p:cNvSpPr/>
+          <p:nvPr/>
+        </p:nvSpPr>
+        <p:spPr>
+          <a:xfrm>
+            <a:off x="548640" y="6446520"/>
+            <a:ext cx="9144000" cy="274320"/>
+          </a:xfrm>
+          <a:prstGeom prst="rect">
+            <a:avLst/>
+          </a:prstGeom>
+          <a:noFill/>
+          <a:ln/>
+        </p:spPr>
+        <p:txBody>
+          <a:bodyPr wrap="square" rtlCol="0" anchor="ctr"/>
+          <a:lstStyle/>
+          <a:p>
+            <a:pPr indent="0" marL="0">
+              <a:buNone/>
+            </a:pPr>
+            <a:r>
+              <a:rPr lang="en-US" sz="1000" dirty="0">
+                <a:solidFill>
+                  <a:srgbClr val="2A303C"/>
+                </a:solidFill>
+                <a:latin typeface="Arial" pitchFamily="34" charset="0"/>
+                <a:ea typeface="Arial" pitchFamily="34" charset="-122"/>
+                <a:cs typeface="Arial" pitchFamily="34" charset="-120"/>
+              </a:rPr>
+              <a:t>ODev — Dossier de création · ODEV-2026-01</a:t>
+            </a:r>
+            <a:endParaRPr lang="en-US" sz="1000" dirty="0"/>
+          </a:p>
+        </p:txBody>
+      </p:sp>
+      <p:sp>
+        <p:nvSpPr>
+          <p:cNvPr id="21" name="Text 16"/>
+          <p:cNvSpPr/>
+          <p:nvPr/>
+        </p:nvSpPr>
+        <p:spPr>
+          <a:xfrm>
+            <a:off x="10241280" y="6446520"/>
+            <a:ext cx="1371600" cy="274320"/>
+          </a:xfrm>
+          <a:prstGeom prst="rect">
+            <a:avLst/>
+          </a:prstGeom>
+          <a:noFill/>
+          <a:ln/>
+        </p:spPr>
+        <p:txBody>
+          <a:bodyPr wrap="square" rtlCol="0" anchor="ctr"/>
+          <a:lstStyle/>
+          <a:p>
+            <a:pPr algn="r" indent="0" marL="0">
+              <a:buNone/>
+            </a:pPr>
+            <a:r>
+              <a:rPr lang="en-US" sz="1000" dirty="0">
+                <a:solidFill>
+                  <a:srgbClr val="2A303C"/>
+                </a:solidFill>
+                <a:latin typeface="Arial" pitchFamily="34" charset="0"/>
+                <a:ea typeface="Arial" pitchFamily="34" charset="-122"/>
+                <a:cs typeface="Arial" pitchFamily="34" charset="-120"/>
+              </a:rPr>
+              <a:t>10 / 13</a:t>
+            </a:r>
+            <a:endParaRPr lang="en-US" sz="1000" dirty="0"/>
+          </a:p>
+        </p:txBody>
+      </p:sp>
+    </p:spTree>
+  </p:cSld>
+  <p:clrMapOvr>
+    <a:masterClrMapping/>
+  </p:clrMapOvr>
+</p:sld>
+</file>
+
+<file path=ppt/slides/slide11.xml><?xml version="1.0" encoding="utf-8"?>
+<p:sld xmlns:a="http://schemas.openxmlformats.org/drawingml/2006/main" xmlns:r="http://schemas.openxmlformats.org/officeDocument/2006/relationships" xmlns:p="http://schemas.openxmlformats.org/presentationml/2006/main">
+  <p:cSld name="Slide 11">
+    <p:spTree>
+      <p:nvGrpSpPr>
+        <p:cNvPr id="1" name=""/>
+        <p:cNvGrpSpPr/>
+        <p:nvPr/>
+      </p:nvGrpSpPr>
+      <p:grpSpPr>
+        <a:xfrm>
+          <a:off x="0" y="0"/>
+          <a:ext cx="0" cy="0"/>
+          <a:chOff x="0" y="0"/>
+          <a:chExt cx="0" cy="0"/>
+        </a:xfrm>
+      </p:grpSpPr>
+      <p:sp>
+        <p:nvSpPr>
+          <p:cNvPr id="2" name="Shape 0"/>
+          <p:cNvSpPr/>
+          <p:nvPr/>
+        </p:nvSpPr>
+        <p:spPr>
+          <a:xfrm>
+            <a:off x="0" y="0"/>
+            <a:ext cx="12191695" cy="6858000"/>
+          </a:xfrm>
+          <a:prstGeom prst="rect">
+            <a:avLst/>
+          </a:prstGeom>
+          <a:solidFill>
+            <a:srgbClr val="12151C"/>
+          </a:solidFill>
+          <a:ln/>
+        </p:spPr>
+      </p:sp>
+      <p:sp>
+        <p:nvSpPr>
+          <p:cNvPr id="3" name="Text 1"/>
+          <p:cNvSpPr/>
+          <p:nvPr/>
+        </p:nvSpPr>
+        <p:spPr>
+          <a:xfrm>
+            <a:off x="640080" y="411480"/>
+            <a:ext cx="10972800" cy="274320"/>
+          </a:xfrm>
+          <a:prstGeom prst="rect">
+            <a:avLst/>
+          </a:prstGeom>
+          <a:noFill/>
+          <a:ln/>
+        </p:spPr>
+        <p:txBody>
+          <a:bodyPr wrap="square" rtlCol="0" anchor="ctr"/>
+          <a:lstStyle/>
+          <a:p>
+            <a:pPr indent="0" marL="0">
+              <a:buNone/>
+            </a:pPr>
+            <a:r>
+              <a:rPr lang="en-US" sz="1100" b="1" spc="300" kern="0" dirty="0">
+                <a:solidFill>
+                  <a:srgbClr val="E63312"/>
+                </a:solidFill>
+                <a:latin typeface="Arial" pitchFamily="34" charset="0"/>
+                <a:ea typeface="Arial" pitchFamily="34" charset="-122"/>
+                <a:cs typeface="Arial" pitchFamily="34" charset="-120"/>
+              </a:rPr>
+              <a:t>05 — MARCHÉ &amp; IMPACT</a:t>
+            </a:r>
+            <a:endParaRPr lang="en-US" sz="1100" dirty="0"/>
+          </a:p>
+        </p:txBody>
+      </p:sp>
+      <p:sp>
+        <p:nvSpPr>
+          <p:cNvPr id="4" name="Text 2"/>
+          <p:cNvSpPr/>
+          <p:nvPr/>
+        </p:nvSpPr>
+        <p:spPr>
+          <a:xfrm>
+            <a:off x="640080" y="822960"/>
+            <a:ext cx="10972800" cy="502920"/>
+          </a:xfrm>
+          <a:prstGeom prst="rect">
+            <a:avLst/>
+          </a:prstGeom>
+          <a:noFill/>
+          <a:ln/>
+        </p:spPr>
+        <p:txBody>
+          <a:bodyPr wrap="square" rtlCol="0" anchor="ctr"/>
+          <a:lstStyle/>
+          <a:p>
+            <a:pPr indent="0" marL="0">
+              <a:buNone/>
+            </a:pPr>
+            <a:r>
+              <a:rPr lang="en-US" sz="3400" b="1" dirty="0">
+                <a:solidFill>
+                  <a:srgbClr val="FFFFFF"/>
+                </a:solidFill>
+                <a:latin typeface="Arial" pitchFamily="34" charset="0"/>
+                <a:ea typeface="Arial" pitchFamily="34" charset="-122"/>
+                <a:cs typeface="Arial" pitchFamily="34" charset="-120"/>
+              </a:rPr>
+              <a:t>À qui s'adresse ODev ?</a:t>
+            </a:r>
+            <a:endParaRPr lang="en-US" sz="3400" dirty="0"/>
+          </a:p>
+        </p:txBody>
+      </p:sp>
+      <p:sp>
+        <p:nvSpPr>
+          <p:cNvPr id="5" name="Text 3"/>
+          <p:cNvSpPr/>
+          <p:nvPr/>
+        </p:nvSpPr>
+        <p:spPr>
+          <a:xfrm>
+            <a:off x="640080" y="1417320"/>
+            <a:ext cx="10515600" cy="548640"/>
+          </a:xfrm>
+          <a:prstGeom prst="rect">
+            <a:avLst/>
+          </a:prstGeom>
+          <a:noFill/>
+          <a:ln/>
+        </p:spPr>
+        <p:txBody>
+          <a:bodyPr wrap="square" rtlCol="0" anchor="ctr"/>
+          <a:lstStyle/>
+          <a:p>
+            <a:pPr indent="0" marL="0">
+              <a:buNone/>
+            </a:pPr>
+            <a:r>
+              <a:rPr lang="en-US" sz="1500" dirty="0">
+                <a:solidFill>
+                  <a:srgbClr val="A8B0BC"/>
+                </a:solidFill>
+                <a:latin typeface="Arial" pitchFamily="34" charset="0"/>
+                <a:ea typeface="Arial" pitchFamily="34" charset="-122"/>
+                <a:cs typeface="Arial" pitchFamily="34" charset="-120"/>
+              </a:rPr>
+              <a:t>Commerces, professions libérales, associations, TPE/PME et organisations qui veulent une présence numérique nette.</a:t>
+            </a:r>
+            <a:endParaRPr lang="en-US" sz="1500" dirty="0"/>
+          </a:p>
+        </p:txBody>
+      </p:sp>
+      <p:sp>
+        <p:nvSpPr>
+          <p:cNvPr id="6" name="Shape 4"/>
+          <p:cNvSpPr/>
+          <p:nvPr/>
+        </p:nvSpPr>
+        <p:spPr>
+          <a:xfrm>
+            <a:off x="640080" y="2286000"/>
+            <a:ext cx="3566160" cy="2286000"/>
+          </a:xfrm>
+          <a:prstGeom prst="rect">
+            <a:avLst/>
+          </a:prstGeom>
+          <a:solidFill>
+            <a:srgbClr val="1C222C"/>
+          </a:solidFill>
+          <a:ln w="12700">
+            <a:solidFill>
+              <a:srgbClr val="2A3340"/>
+            </a:solidFill>
+            <a:prstDash val="solid"/>
+          </a:ln>
+        </p:spPr>
+      </p:sp>
+      <p:sp>
+        <p:nvSpPr>
+          <p:cNvPr id="7" name="Text 5"/>
+          <p:cNvSpPr/>
+          <p:nvPr/>
+        </p:nvSpPr>
+        <p:spPr>
+          <a:xfrm>
+            <a:off x="868680" y="2514600"/>
+            <a:ext cx="3108960" cy="365760"/>
+          </a:xfrm>
+          <a:prstGeom prst="rect">
+            <a:avLst/>
+          </a:prstGeom>
+          <a:noFill/>
+          <a:ln/>
+        </p:spPr>
+        <p:txBody>
+          <a:bodyPr wrap="square" rtlCol="0" anchor="ctr"/>
+          <a:lstStyle/>
+          <a:p>
+            <a:pPr indent="0" marL="0">
+              <a:buNone/>
+            </a:pPr>
+            <a:r>
+              <a:rPr lang="en-US" sz="1600" b="1" dirty="0">
+                <a:solidFill>
+                  <a:srgbClr val="FFFFFF"/>
+                </a:solidFill>
+                <a:latin typeface="Arial" pitchFamily="34" charset="0"/>
+                <a:ea typeface="Arial" pitchFamily="34" charset="-122"/>
+                <a:cs typeface="Arial" pitchFamily="34" charset="-120"/>
+              </a:rPr>
+              <a:t>Clients cibles</a:t>
+            </a:r>
+            <a:endParaRPr lang="en-US" sz="1600" dirty="0"/>
+          </a:p>
+        </p:txBody>
+      </p:sp>
+      <p:sp>
+        <p:nvSpPr>
+          <p:cNvPr id="8" name="Text 6"/>
+          <p:cNvSpPr/>
+          <p:nvPr/>
+        </p:nvSpPr>
+        <p:spPr>
+          <a:xfrm>
+            <a:off x="868680" y="3017520"/>
+            <a:ext cx="3108960" cy="1280160"/>
+          </a:xfrm>
+          <a:prstGeom prst="rect">
+            <a:avLst/>
+          </a:prstGeom>
+          <a:noFill/>
+          <a:ln/>
+        </p:spPr>
+        <p:txBody>
+          <a:bodyPr wrap="square" rtlCol="0" anchor="ctr"/>
+          <a:lstStyle/>
+          <a:p>
+            <a:pPr indent="0" marL="0">
+              <a:buNone/>
+            </a:pPr>
+            <a:r>
+              <a:rPr lang="en-US" sz="1300" dirty="0">
+                <a:solidFill>
+                  <a:srgbClr val="A8B0BC"/>
+                </a:solidFill>
+                <a:latin typeface="Arial" pitchFamily="34" charset="0"/>
+                <a:ea typeface="Arial" pitchFamily="34" charset="-122"/>
+                <a:cs typeface="Arial" pitchFamily="34" charset="-120"/>
+              </a:rPr>
+              <a:t>Entreprises locales, indépendants, structures en création ou modernisation digitale.</a:t>
+            </a:r>
+            <a:endParaRPr lang="en-US" sz="1300" dirty="0"/>
+          </a:p>
+        </p:txBody>
+      </p:sp>
+      <p:sp>
+        <p:nvSpPr>
+          <p:cNvPr id="9" name="Shape 7"/>
+          <p:cNvSpPr/>
+          <p:nvPr/>
+        </p:nvSpPr>
+        <p:spPr>
+          <a:xfrm>
+            <a:off x="4389120" y="2286000"/>
+            <a:ext cx="3566160" cy="2286000"/>
+          </a:xfrm>
+          <a:prstGeom prst="rect">
+            <a:avLst/>
+          </a:prstGeom>
+          <a:solidFill>
+            <a:srgbClr val="1C222C"/>
+          </a:solidFill>
+          <a:ln w="12700">
+            <a:solidFill>
+              <a:srgbClr val="2A3340"/>
+            </a:solidFill>
+            <a:prstDash val="solid"/>
+          </a:ln>
+        </p:spPr>
+      </p:sp>
+      <p:sp>
+        <p:nvSpPr>
+          <p:cNvPr id="10" name="Text 8"/>
+          <p:cNvSpPr/>
+          <p:nvPr/>
+        </p:nvSpPr>
+        <p:spPr>
+          <a:xfrm>
+            <a:off x="4617720" y="2514600"/>
+            <a:ext cx="3108960" cy="365760"/>
+          </a:xfrm>
+          <a:prstGeom prst="rect">
+            <a:avLst/>
+          </a:prstGeom>
+          <a:noFill/>
+          <a:ln/>
+        </p:spPr>
+        <p:txBody>
+          <a:bodyPr wrap="square" rtlCol="0" anchor="ctr"/>
+          <a:lstStyle/>
+          <a:p>
+            <a:pPr indent="0" marL="0">
+              <a:buNone/>
+            </a:pPr>
+            <a:r>
+              <a:rPr lang="en-US" sz="1600" b="1" dirty="0">
+                <a:solidFill>
+                  <a:srgbClr val="FFFFFF"/>
+                </a:solidFill>
+                <a:latin typeface="Arial" pitchFamily="34" charset="0"/>
+                <a:ea typeface="Arial" pitchFamily="34" charset="-122"/>
+                <a:cs typeface="Arial" pitchFamily="34" charset="-120"/>
+              </a:rPr>
+              <a:t>Besoin couvert</a:t>
+            </a:r>
+            <a:endParaRPr lang="en-US" sz="1600" dirty="0"/>
+          </a:p>
+        </p:txBody>
+      </p:sp>
+      <p:sp>
+        <p:nvSpPr>
+          <p:cNvPr id="11" name="Text 9"/>
+          <p:cNvSpPr/>
+          <p:nvPr/>
+        </p:nvSpPr>
+        <p:spPr>
+          <a:xfrm>
+            <a:off x="4617720" y="3017520"/>
+            <a:ext cx="3108960" cy="1280160"/>
+          </a:xfrm>
+          <a:prstGeom prst="rect">
+            <a:avLst/>
+          </a:prstGeom>
+          <a:noFill/>
+          <a:ln/>
+        </p:spPr>
+        <p:txBody>
+          <a:bodyPr wrap="square" rtlCol="0" anchor="ctr"/>
+          <a:lstStyle/>
+          <a:p>
+            <a:pPr indent="0" marL="0">
+              <a:buNone/>
+            </a:pPr>
+            <a:r>
+              <a:rPr lang="en-US" sz="1300" dirty="0">
+                <a:solidFill>
+                  <a:srgbClr val="A8B0BC"/>
+                </a:solidFill>
+                <a:latin typeface="Arial" pitchFamily="34" charset="0"/>
+                <a:ea typeface="Arial" pitchFamily="34" charset="-122"/>
+                <a:cs typeface="Arial" pitchFamily="34" charset="-120"/>
+              </a:rPr>
+              <a:t>Visibilité, conversion, organisation interne et outils sur mesure.</a:t>
+            </a:r>
+            <a:endParaRPr lang="en-US" sz="1300" dirty="0"/>
+          </a:p>
+        </p:txBody>
+      </p:sp>
+      <p:sp>
+        <p:nvSpPr>
+          <p:cNvPr id="12" name="Shape 10"/>
+          <p:cNvSpPr/>
+          <p:nvPr/>
+        </p:nvSpPr>
+        <p:spPr>
+          <a:xfrm>
+            <a:off x="8138160" y="2286000"/>
+            <a:ext cx="3566160" cy="2286000"/>
+          </a:xfrm>
+          <a:prstGeom prst="rect">
+            <a:avLst/>
+          </a:prstGeom>
+          <a:solidFill>
+            <a:srgbClr val="1C222C"/>
+          </a:solidFill>
+          <a:ln w="12700">
+            <a:solidFill>
+              <a:srgbClr val="2A3340"/>
+            </a:solidFill>
+            <a:prstDash val="solid"/>
+          </a:ln>
+        </p:spPr>
+      </p:sp>
+      <p:sp>
+        <p:nvSpPr>
+          <p:cNvPr id="13" name="Text 11"/>
+          <p:cNvSpPr/>
+          <p:nvPr/>
+        </p:nvSpPr>
+        <p:spPr>
+          <a:xfrm>
+            <a:off x="8366760" y="2514600"/>
+            <a:ext cx="3108960" cy="365760"/>
+          </a:xfrm>
+          <a:prstGeom prst="rect">
+            <a:avLst/>
+          </a:prstGeom>
+          <a:noFill/>
+          <a:ln/>
+        </p:spPr>
+        <p:txBody>
+          <a:bodyPr wrap="square" rtlCol="0" anchor="ctr"/>
+          <a:lstStyle/>
+          <a:p>
+            <a:pPr indent="0" marL="0">
+              <a:buNone/>
+            </a:pPr>
+            <a:r>
+              <a:rPr lang="en-US" sz="1600" b="1" dirty="0">
+                <a:solidFill>
+                  <a:srgbClr val="FFFFFF"/>
+                </a:solidFill>
+                <a:latin typeface="Arial" pitchFamily="34" charset="0"/>
+                <a:ea typeface="Arial" pitchFamily="34" charset="-122"/>
+                <a:cs typeface="Arial" pitchFamily="34" charset="-120"/>
+              </a:rPr>
+              <a:t>Impact attendu</a:t>
+            </a:r>
+            <a:endParaRPr lang="en-US" sz="1600" dirty="0"/>
+          </a:p>
+        </p:txBody>
+      </p:sp>
+      <p:sp>
+        <p:nvSpPr>
+          <p:cNvPr id="14" name="Text 12"/>
+          <p:cNvSpPr/>
+          <p:nvPr/>
+        </p:nvSpPr>
+        <p:spPr>
+          <a:xfrm>
+            <a:off x="8366760" y="3017520"/>
+            <a:ext cx="3108960" cy="1280160"/>
+          </a:xfrm>
+          <a:prstGeom prst="rect">
+            <a:avLst/>
+          </a:prstGeom>
+          <a:noFill/>
+          <a:ln/>
+        </p:spPr>
+        <p:txBody>
+          <a:bodyPr wrap="square" rtlCol="0" anchor="ctr"/>
+          <a:lstStyle/>
+          <a:p>
+            <a:pPr indent="0" marL="0">
+              <a:buNone/>
+            </a:pPr>
+            <a:r>
+              <a:rPr lang="en-US" sz="1300" dirty="0">
+                <a:solidFill>
+                  <a:srgbClr val="A8B0BC"/>
+                </a:solidFill>
+                <a:latin typeface="Arial" pitchFamily="34" charset="0"/>
+                <a:ea typeface="Arial" pitchFamily="34" charset="-122"/>
+                <a:cs typeface="Arial" pitchFamily="34" charset="-120"/>
+              </a:rPr>
+              <a:t>Accès à des services numériques professionnels pour le tissu économique local.</a:t>
+            </a:r>
+            <a:endParaRPr lang="en-US" sz="1300" dirty="0"/>
+          </a:p>
+        </p:txBody>
+      </p:sp>
+      <p:sp>
+        <p:nvSpPr>
+          <p:cNvPr id="15" name="Text 13"/>
+          <p:cNvSpPr/>
+          <p:nvPr/>
+        </p:nvSpPr>
+        <p:spPr>
+          <a:xfrm>
+            <a:off x="548640" y="6446520"/>
+            <a:ext cx="9144000" cy="274320"/>
+          </a:xfrm>
+          <a:prstGeom prst="rect">
+            <a:avLst/>
+          </a:prstGeom>
+          <a:noFill/>
+          <a:ln/>
+        </p:spPr>
+        <p:txBody>
+          <a:bodyPr wrap="square" rtlCol="0" anchor="ctr"/>
+          <a:lstStyle/>
+          <a:p>
+            <a:pPr indent="0" marL="0">
+              <a:buNone/>
+            </a:pPr>
+            <a:r>
+              <a:rPr lang="en-US" sz="1000" dirty="0">
+                <a:solidFill>
+                  <a:srgbClr val="6B7380"/>
+                </a:solidFill>
+                <a:latin typeface="Arial" pitchFamily="34" charset="0"/>
+                <a:ea typeface="Arial" pitchFamily="34" charset="-122"/>
+                <a:cs typeface="Arial" pitchFamily="34" charset="-120"/>
+              </a:rPr>
+              <a:t>ODev — Dossier de création · ODEV-2026-01</a:t>
+            </a:r>
+            <a:endParaRPr lang="en-US" sz="1000" dirty="0"/>
+          </a:p>
+        </p:txBody>
+      </p:sp>
+      <p:sp>
+        <p:nvSpPr>
+          <p:cNvPr id="16" name="Text 14"/>
+          <p:cNvSpPr/>
+          <p:nvPr/>
+        </p:nvSpPr>
+        <p:spPr>
+          <a:xfrm>
+            <a:off x="10241280" y="6446520"/>
+            <a:ext cx="1371600" cy="274320"/>
+          </a:xfrm>
+          <a:prstGeom prst="rect">
+            <a:avLst/>
+          </a:prstGeom>
+          <a:noFill/>
+          <a:ln/>
+        </p:spPr>
+        <p:txBody>
+          <a:bodyPr wrap="square" rtlCol="0" anchor="ctr"/>
+          <a:lstStyle/>
+          <a:p>
+            <a:pPr algn="r" indent="0" marL="0">
+              <a:buNone/>
+            </a:pPr>
+            <a:r>
+              <a:rPr lang="en-US" sz="1000" dirty="0">
+                <a:solidFill>
+                  <a:srgbClr val="6B7380"/>
+                </a:solidFill>
+                <a:latin typeface="Arial" pitchFamily="34" charset="0"/>
+                <a:ea typeface="Arial" pitchFamily="34" charset="-122"/>
+                <a:cs typeface="Arial" pitchFamily="34" charset="-120"/>
+              </a:rPr>
+              <a:t>11 / 13</a:t>
+            </a:r>
+            <a:endParaRPr lang="en-US" sz="1000" dirty="0"/>
+          </a:p>
+        </p:txBody>
+      </p:sp>
+    </p:spTree>
+  </p:cSld>
+  <p:clrMapOvr>
+    <a:masterClrMapping/>
+  </p:clrMapOvr>
+</p:sld>
+</file>
+
+<file path=ppt/slides/slide12.xml><?xml version="1.0" encoding="utf-8"?>
+<p:sld xmlns:a="http://schemas.openxmlformats.org/drawingml/2006/main" xmlns:r="http://schemas.openxmlformats.org/officeDocument/2006/relationships" xmlns:p="http://schemas.openxmlformats.org/presentationml/2006/main">
+  <p:cSld name="Slide 12">
+    <p:spTree>
+      <p:nvGrpSpPr>
+        <p:cNvPr id="1" name=""/>
+        <p:cNvGrpSpPr/>
+        <p:nvPr/>
+      </p:nvGrpSpPr>
+      <p:grpSpPr>
+        <a:xfrm>
+          <a:off x="0" y="0"/>
+          <a:ext cx="0" cy="0"/>
+          <a:chOff x="0" y="0"/>
+          <a:chExt cx="0" cy="0"/>
+        </a:xfrm>
+      </p:grpSpPr>
+      <p:sp>
+        <p:nvSpPr>
+          <p:cNvPr id="2" name="Shape 0"/>
+          <p:cNvSpPr/>
+          <p:nvPr/>
+        </p:nvSpPr>
+        <p:spPr>
+          <a:xfrm>
+            <a:off x="0" y="0"/>
+            <a:ext cx="12191695" cy="6858000"/>
+          </a:xfrm>
+          <a:prstGeom prst="rect">
+            <a:avLst/>
+          </a:prstGeom>
+          <a:solidFill>
+            <a:srgbClr val="FFFFFF"/>
+          </a:solidFill>
+          <a:ln/>
+        </p:spPr>
+      </p:sp>
+      <p:sp>
+        <p:nvSpPr>
+          <p:cNvPr id="3" name="Text 1"/>
+          <p:cNvSpPr/>
+          <p:nvPr/>
+        </p:nvSpPr>
+        <p:spPr>
+          <a:xfrm>
+            <a:off x="640080" y="411480"/>
+            <a:ext cx="10972800" cy="274320"/>
+          </a:xfrm>
+          <a:prstGeom prst="rect">
+            <a:avLst/>
+          </a:prstGeom>
+          <a:noFill/>
+          <a:ln/>
+        </p:spPr>
+        <p:txBody>
+          <a:bodyPr wrap="square" rtlCol="0" anchor="ctr"/>
+          <a:lstStyle/>
+          <a:p>
+            <a:pPr indent="0" marL="0">
+              <a:buNone/>
+            </a:pPr>
+            <a:r>
+              <a:rPr lang="en-US" sz="1100" b="1" spc="400" kern="0" dirty="0">
+                <a:solidFill>
+                  <a:srgbClr val="E63312"/>
+                </a:solidFill>
+                <a:latin typeface="Arial" pitchFamily="34" charset="0"/>
+                <a:ea typeface="Arial" pitchFamily="34" charset="-122"/>
+                <a:cs typeface="Arial" pitchFamily="34" charset="-120"/>
+              </a:rPr>
+              <a:t>06 — MODÈLE &amp; PORTEUR</a:t>
+            </a:r>
+            <a:endParaRPr lang="en-US" sz="1100" dirty="0"/>
+          </a:p>
+        </p:txBody>
+      </p:sp>
+      <p:sp>
+        <p:nvSpPr>
+          <p:cNvPr id="4" name="Text 2"/>
+          <p:cNvSpPr/>
+          <p:nvPr/>
+        </p:nvSpPr>
+        <p:spPr>
+          <a:xfrm>
+            <a:off x="640080" y="777240"/>
+            <a:ext cx="10972800" cy="457200"/>
+          </a:xfrm>
+          <a:prstGeom prst="rect">
+            <a:avLst/>
+          </a:prstGeom>
+          <a:noFill/>
+          <a:ln/>
+        </p:spPr>
+        <p:txBody>
+          <a:bodyPr wrap="square" rtlCol="0" anchor="ctr"/>
+          <a:lstStyle/>
+          <a:p>
+            <a:pPr indent="0" marL="0">
+              <a:buNone/>
+            </a:pPr>
+            <a:r>
+              <a:rPr lang="en-US" sz="3000" b="1" dirty="0">
+                <a:solidFill>
+                  <a:srgbClr val="12151C"/>
+                </a:solidFill>
+                <a:latin typeface="Arial" pitchFamily="34" charset="0"/>
+                <a:ea typeface="Arial" pitchFamily="34" charset="-122"/>
+                <a:cs typeface="Arial" pitchFamily="34" charset="-120"/>
+              </a:rPr>
+              <a:t>Fonctionnement &amp; responsabilité</a:t>
+            </a:r>
+            <a:endParaRPr lang="en-US" sz="3000" dirty="0"/>
+          </a:p>
+        </p:txBody>
+      </p:sp>
+      <p:sp>
+        <p:nvSpPr>
+          <p:cNvPr id="5" name="Shape 3"/>
+          <p:cNvSpPr/>
+          <p:nvPr/>
+        </p:nvSpPr>
+        <p:spPr>
+          <a:xfrm>
+            <a:off x="640080" y="1463040"/>
+            <a:ext cx="2697480" cy="73152"/>
+          </a:xfrm>
+          <a:prstGeom prst="rect">
+            <a:avLst/>
+          </a:prstGeom>
+          <a:solidFill>
+            <a:srgbClr val="E63312"/>
+          </a:solidFill>
+          <a:ln/>
+        </p:spPr>
+      </p:sp>
+      <p:sp>
+        <p:nvSpPr>
+          <p:cNvPr id="6" name="Text 4"/>
+          <p:cNvSpPr/>
+          <p:nvPr/>
+        </p:nvSpPr>
+        <p:spPr>
+          <a:xfrm>
+            <a:off x="640080" y="1691640"/>
+            <a:ext cx="2697480" cy="320040"/>
+          </a:xfrm>
+          <a:prstGeom prst="rect">
+            <a:avLst/>
+          </a:prstGeom>
+          <a:noFill/>
+          <a:ln/>
+        </p:spPr>
+        <p:txBody>
+          <a:bodyPr wrap="square" rtlCol="0" anchor="ctr"/>
+          <a:lstStyle/>
+          <a:p>
+            <a:pPr indent="0" marL="0">
+              <a:buNone/>
+            </a:pPr>
+            <a:r>
+              <a:rPr lang="en-US" sz="1400" b="1" dirty="0">
+                <a:solidFill>
+                  <a:srgbClr val="E63312"/>
+                </a:solidFill>
+                <a:latin typeface="Arial" pitchFamily="34" charset="0"/>
+                <a:ea typeface="Arial" pitchFamily="34" charset="-122"/>
+                <a:cs typeface="Arial" pitchFamily="34" charset="-120"/>
+              </a:rPr>
+              <a:t>01</a:t>
+            </a:r>
+            <a:endParaRPr lang="en-US" sz="1400" dirty="0"/>
+          </a:p>
+        </p:txBody>
+      </p:sp>
+      <p:sp>
+        <p:nvSpPr>
+          <p:cNvPr id="7" name="Text 5"/>
+          <p:cNvSpPr/>
+          <p:nvPr/>
+        </p:nvSpPr>
+        <p:spPr>
+          <a:xfrm>
+            <a:off x="640080" y="2011680"/>
+            <a:ext cx="2697480" cy="320040"/>
+          </a:xfrm>
+          <a:prstGeom prst="rect">
+            <a:avLst/>
+          </a:prstGeom>
+          <a:noFill/>
+          <a:ln/>
+        </p:spPr>
+        <p:txBody>
+          <a:bodyPr wrap="square" rtlCol="0" anchor="ctr"/>
+          <a:lstStyle/>
+          <a:p>
+            <a:pPr indent="0" marL="0">
+              <a:buNone/>
+            </a:pPr>
+            <a:r>
+              <a:rPr lang="en-US" sz="1600" b="1" dirty="0">
+                <a:solidFill>
+                  <a:srgbClr val="12151C"/>
+                </a:solidFill>
+                <a:latin typeface="Arial" pitchFamily="34" charset="0"/>
+                <a:ea typeface="Arial" pitchFamily="34" charset="-122"/>
+                <a:cs typeface="Arial" pitchFamily="34" charset="-120"/>
+              </a:rPr>
+              <a:t>Brief</a:t>
+            </a:r>
+            <a:endParaRPr lang="en-US" sz="1600" dirty="0"/>
+          </a:p>
+        </p:txBody>
+      </p:sp>
+      <p:sp>
+        <p:nvSpPr>
+          <p:cNvPr id="8" name="Text 6"/>
+          <p:cNvSpPr/>
+          <p:nvPr/>
+        </p:nvSpPr>
+        <p:spPr>
+          <a:xfrm>
+            <a:off x="640080" y="2331720"/>
+            <a:ext cx="2697480" cy="320040"/>
+          </a:xfrm>
+          <a:prstGeom prst="rect">
+            <a:avLst/>
+          </a:prstGeom>
+          <a:noFill/>
+          <a:ln/>
+        </p:spPr>
+        <p:txBody>
+          <a:bodyPr wrap="square" rtlCol="0" anchor="ctr"/>
+          <a:lstStyle/>
+          <a:p>
+            <a:pPr indent="0" marL="0">
+              <a:buNone/>
+            </a:pPr>
+            <a:r>
+              <a:rPr lang="en-US" sz="1200" dirty="0">
+                <a:solidFill>
+                  <a:srgbClr val="2A303C"/>
+                </a:solidFill>
+                <a:latin typeface="Arial" pitchFamily="34" charset="0"/>
+                <a:ea typeface="Arial" pitchFamily="34" charset="-122"/>
+                <a:cs typeface="Arial" pitchFamily="34" charset="-120"/>
+              </a:rPr>
+              <a:t>Écoute, cadrage, devis</a:t>
+            </a:r>
+            <a:endParaRPr lang="en-US" sz="1200" dirty="0"/>
+          </a:p>
+        </p:txBody>
+      </p:sp>
+      <p:sp>
+        <p:nvSpPr>
+          <p:cNvPr id="9" name="Shape 7"/>
+          <p:cNvSpPr/>
+          <p:nvPr/>
+        </p:nvSpPr>
+        <p:spPr>
+          <a:xfrm>
+            <a:off x="3474720" y="1463040"/>
+            <a:ext cx="2697480" cy="73152"/>
+          </a:xfrm>
+          <a:prstGeom prst="rect">
+            <a:avLst/>
+          </a:prstGeom>
+          <a:solidFill>
+            <a:srgbClr val="E63312"/>
+          </a:solidFill>
+          <a:ln/>
+        </p:spPr>
+      </p:sp>
+      <p:sp>
+        <p:nvSpPr>
+          <p:cNvPr id="10" name="Text 8"/>
+          <p:cNvSpPr/>
+          <p:nvPr/>
+        </p:nvSpPr>
+        <p:spPr>
+          <a:xfrm>
+            <a:off x="3474720" y="1691640"/>
+            <a:ext cx="2697480" cy="320040"/>
+          </a:xfrm>
+          <a:prstGeom prst="rect">
+            <a:avLst/>
+          </a:prstGeom>
+          <a:noFill/>
+          <a:ln/>
+        </p:spPr>
+        <p:txBody>
+          <a:bodyPr wrap="square" rtlCol="0" anchor="ctr"/>
+          <a:lstStyle/>
+          <a:p>
+            <a:pPr indent="0" marL="0">
+              <a:buNone/>
+            </a:pPr>
+            <a:r>
+              <a:rPr lang="en-US" sz="1400" b="1" dirty="0">
+                <a:solidFill>
+                  <a:srgbClr val="E63312"/>
+                </a:solidFill>
+                <a:latin typeface="Arial" pitchFamily="34" charset="0"/>
+                <a:ea typeface="Arial" pitchFamily="34" charset="-122"/>
+                <a:cs typeface="Arial" pitchFamily="34" charset="-120"/>
+              </a:rPr>
+              <a:t>02</a:t>
+            </a:r>
+            <a:endParaRPr lang="en-US" sz="1400" dirty="0"/>
+          </a:p>
+        </p:txBody>
+      </p:sp>
+      <p:sp>
+        <p:nvSpPr>
+          <p:cNvPr id="11" name="Text 9"/>
+          <p:cNvSpPr/>
+          <p:nvPr/>
+        </p:nvSpPr>
+        <p:spPr>
+          <a:xfrm>
+            <a:off x="3474720" y="2011680"/>
+            <a:ext cx="2697480" cy="320040"/>
+          </a:xfrm>
+          <a:prstGeom prst="rect">
+            <a:avLst/>
+          </a:prstGeom>
+          <a:noFill/>
+          <a:ln/>
+        </p:spPr>
+        <p:txBody>
+          <a:bodyPr wrap="square" rtlCol="0" anchor="ctr"/>
+          <a:lstStyle/>
+          <a:p>
+            <a:pPr indent="0" marL="0">
+              <a:buNone/>
+            </a:pPr>
+            <a:r>
+              <a:rPr lang="en-US" sz="1600" b="1" dirty="0">
+                <a:solidFill>
+                  <a:srgbClr val="12151C"/>
+                </a:solidFill>
+                <a:latin typeface="Arial" pitchFamily="34" charset="0"/>
+                <a:ea typeface="Arial" pitchFamily="34" charset="-122"/>
+                <a:cs typeface="Arial" pitchFamily="34" charset="-120"/>
+              </a:rPr>
+              <a:t>Conception</a:t>
+            </a:r>
+            <a:endParaRPr lang="en-US" sz="1600" dirty="0"/>
+          </a:p>
+        </p:txBody>
+      </p:sp>
+      <p:sp>
+        <p:nvSpPr>
+          <p:cNvPr id="12" name="Text 10"/>
+          <p:cNvSpPr/>
+          <p:nvPr/>
+        </p:nvSpPr>
+        <p:spPr>
+          <a:xfrm>
+            <a:off x="3474720" y="2331720"/>
+            <a:ext cx="2697480" cy="320040"/>
+          </a:xfrm>
+          <a:prstGeom prst="rect">
+            <a:avLst/>
+          </a:prstGeom>
+          <a:noFill/>
+          <a:ln/>
+        </p:spPr>
+        <p:txBody>
+          <a:bodyPr wrap="square" rtlCol="0" anchor="ctr"/>
+          <a:lstStyle/>
+          <a:p>
+            <a:pPr indent="0" marL="0">
+              <a:buNone/>
+            </a:pPr>
+            <a:r>
+              <a:rPr lang="en-US" sz="1200" dirty="0">
+                <a:solidFill>
+                  <a:srgbClr val="2A303C"/>
+                </a:solidFill>
+                <a:latin typeface="Arial" pitchFamily="34" charset="0"/>
+                <a:ea typeface="Arial" pitchFamily="34" charset="-122"/>
+                <a:cs typeface="Arial" pitchFamily="34" charset="-120"/>
+              </a:rPr>
+              <a:t>Architecture &amp; validation</a:t>
+            </a:r>
+            <a:endParaRPr lang="en-US" sz="1200" dirty="0"/>
+          </a:p>
+        </p:txBody>
+      </p:sp>
+      <p:sp>
+        <p:nvSpPr>
+          <p:cNvPr id="13" name="Shape 11"/>
+          <p:cNvSpPr/>
+          <p:nvPr/>
+        </p:nvSpPr>
+        <p:spPr>
+          <a:xfrm>
+            <a:off x="6309360" y="1463040"/>
+            <a:ext cx="2697480" cy="73152"/>
+          </a:xfrm>
+          <a:prstGeom prst="rect">
+            <a:avLst/>
+          </a:prstGeom>
+          <a:solidFill>
+            <a:srgbClr val="E63312"/>
+          </a:solidFill>
+          <a:ln/>
+        </p:spPr>
+      </p:sp>
+      <p:sp>
+        <p:nvSpPr>
+          <p:cNvPr id="14" name="Text 12"/>
+          <p:cNvSpPr/>
+          <p:nvPr/>
+        </p:nvSpPr>
+        <p:spPr>
+          <a:xfrm>
+            <a:off x="6309360" y="1691640"/>
+            <a:ext cx="2697480" cy="320040"/>
+          </a:xfrm>
+          <a:prstGeom prst="rect">
+            <a:avLst/>
+          </a:prstGeom>
+          <a:noFill/>
+          <a:ln/>
+        </p:spPr>
+        <p:txBody>
+          <a:bodyPr wrap="square" rtlCol="0" anchor="ctr"/>
+          <a:lstStyle/>
+          <a:p>
+            <a:pPr indent="0" marL="0">
+              <a:buNone/>
+            </a:pPr>
+            <a:r>
+              <a:rPr lang="en-US" sz="1400" b="1" dirty="0">
+                <a:solidFill>
+                  <a:srgbClr val="E63312"/>
+                </a:solidFill>
+                <a:latin typeface="Arial" pitchFamily="34" charset="0"/>
+                <a:ea typeface="Arial" pitchFamily="34" charset="-122"/>
+                <a:cs typeface="Arial" pitchFamily="34" charset="-120"/>
+              </a:rPr>
+              <a:t>03</a:t>
+            </a:r>
+            <a:endParaRPr lang="en-US" sz="1400" dirty="0"/>
+          </a:p>
+        </p:txBody>
+      </p:sp>
+      <p:sp>
+        <p:nvSpPr>
+          <p:cNvPr id="15" name="Text 13"/>
+          <p:cNvSpPr/>
+          <p:nvPr/>
+        </p:nvSpPr>
+        <p:spPr>
+          <a:xfrm>
+            <a:off x="6309360" y="2011680"/>
+            <a:ext cx="2697480" cy="320040"/>
+          </a:xfrm>
+          <a:prstGeom prst="rect">
+            <a:avLst/>
+          </a:prstGeom>
+          <a:noFill/>
+          <a:ln/>
+        </p:spPr>
+        <p:txBody>
+          <a:bodyPr wrap="square" rtlCol="0" anchor="ctr"/>
+          <a:lstStyle/>
+          <a:p>
+            <a:pPr indent="0" marL="0">
+              <a:buNone/>
+            </a:pPr>
+            <a:r>
+              <a:rPr lang="en-US" sz="1600" b="1" dirty="0">
+                <a:solidFill>
+                  <a:srgbClr val="12151C"/>
+                </a:solidFill>
+                <a:latin typeface="Arial" pitchFamily="34" charset="0"/>
+                <a:ea typeface="Arial" pitchFamily="34" charset="-122"/>
+                <a:cs typeface="Arial" pitchFamily="34" charset="-120"/>
+              </a:rPr>
+              <a:t>Développement</a:t>
+            </a:r>
+            <a:endParaRPr lang="en-US" sz="1600" dirty="0"/>
+          </a:p>
+        </p:txBody>
+      </p:sp>
+      <p:sp>
+        <p:nvSpPr>
+          <p:cNvPr id="16" name="Text 14"/>
+          <p:cNvSpPr/>
+          <p:nvPr/>
+        </p:nvSpPr>
+        <p:spPr>
+          <a:xfrm>
+            <a:off x="6309360" y="2331720"/>
+            <a:ext cx="2697480" cy="320040"/>
+          </a:xfrm>
+          <a:prstGeom prst="rect">
+            <a:avLst/>
+          </a:prstGeom>
+          <a:noFill/>
+          <a:ln/>
+        </p:spPr>
+        <p:txBody>
+          <a:bodyPr wrap="square" rtlCol="0" anchor="ctr"/>
+          <a:lstStyle/>
+          <a:p>
+            <a:pPr indent="0" marL="0">
+              <a:buNone/>
+            </a:pPr>
+            <a:r>
+              <a:rPr lang="en-US" sz="1200" dirty="0">
+                <a:solidFill>
+                  <a:srgbClr val="2A303C"/>
+                </a:solidFill>
+                <a:latin typeface="Arial" pitchFamily="34" charset="0"/>
+                <a:ea typeface="Arial" pitchFamily="34" charset="-122"/>
+                <a:cs typeface="Arial" pitchFamily="34" charset="-120"/>
+              </a:rPr>
+              <a:t>Production itérative</a:t>
+            </a:r>
+            <a:endParaRPr lang="en-US" sz="1200" dirty="0"/>
+          </a:p>
+        </p:txBody>
+      </p:sp>
+      <p:sp>
+        <p:nvSpPr>
+          <p:cNvPr id="17" name="Shape 15"/>
+          <p:cNvSpPr/>
+          <p:nvPr/>
+        </p:nvSpPr>
+        <p:spPr>
+          <a:xfrm>
+            <a:off x="9144000" y="1463040"/>
+            <a:ext cx="2697480" cy="73152"/>
+          </a:xfrm>
+          <a:prstGeom prst="rect">
+            <a:avLst/>
+          </a:prstGeom>
+          <a:solidFill>
+            <a:srgbClr val="E63312"/>
+          </a:solidFill>
+          <a:ln/>
+        </p:spPr>
+      </p:sp>
+      <p:sp>
+        <p:nvSpPr>
+          <p:cNvPr id="18" name="Text 16"/>
+          <p:cNvSpPr/>
+          <p:nvPr/>
+        </p:nvSpPr>
+        <p:spPr>
+          <a:xfrm>
+            <a:off x="9144000" y="1691640"/>
+            <a:ext cx="2697480" cy="320040"/>
+          </a:xfrm>
+          <a:prstGeom prst="rect">
+            <a:avLst/>
+          </a:prstGeom>
+          <a:noFill/>
+          <a:ln/>
+        </p:spPr>
+        <p:txBody>
+          <a:bodyPr wrap="square" rtlCol="0" anchor="ctr"/>
+          <a:lstStyle/>
+          <a:p>
+            <a:pPr indent="0" marL="0">
+              <a:buNone/>
+            </a:pPr>
+            <a:r>
+              <a:rPr lang="en-US" sz="1400" b="1" dirty="0">
+                <a:solidFill>
+                  <a:srgbClr val="E63312"/>
+                </a:solidFill>
+                <a:latin typeface="Arial" pitchFamily="34" charset="0"/>
+                <a:ea typeface="Arial" pitchFamily="34" charset="-122"/>
+                <a:cs typeface="Arial" pitchFamily="34" charset="-120"/>
+              </a:rPr>
+              <a:t>04</a:t>
+            </a:r>
+            <a:endParaRPr lang="en-US" sz="1400" dirty="0"/>
+          </a:p>
+        </p:txBody>
+      </p:sp>
+      <p:sp>
+        <p:nvSpPr>
+          <p:cNvPr id="19" name="Text 17"/>
+          <p:cNvSpPr/>
+          <p:nvPr/>
+        </p:nvSpPr>
+        <p:spPr>
+          <a:xfrm>
+            <a:off x="9144000" y="2011680"/>
+            <a:ext cx="2697480" cy="320040"/>
+          </a:xfrm>
+          <a:prstGeom prst="rect">
+            <a:avLst/>
+          </a:prstGeom>
+          <a:noFill/>
+          <a:ln/>
+        </p:spPr>
+        <p:txBody>
+          <a:bodyPr wrap="square" rtlCol="0" anchor="ctr"/>
+          <a:lstStyle/>
+          <a:p>
+            <a:pPr indent="0" marL="0">
+              <a:buNone/>
+            </a:pPr>
+            <a:r>
+              <a:rPr lang="en-US" sz="1600" b="1" dirty="0">
+                <a:solidFill>
+                  <a:srgbClr val="12151C"/>
+                </a:solidFill>
+                <a:latin typeface="Arial" pitchFamily="34" charset="0"/>
+                <a:ea typeface="Arial" pitchFamily="34" charset="-122"/>
+                <a:cs typeface="Arial" pitchFamily="34" charset="-120"/>
+              </a:rPr>
+              <a:t>Livraison</a:t>
+            </a:r>
+            <a:endParaRPr lang="en-US" sz="1600" dirty="0"/>
+          </a:p>
+        </p:txBody>
+      </p:sp>
+      <p:sp>
+        <p:nvSpPr>
+          <p:cNvPr id="20" name="Text 18"/>
+          <p:cNvSpPr/>
+          <p:nvPr/>
+        </p:nvSpPr>
+        <p:spPr>
+          <a:xfrm>
+            <a:off x="9144000" y="2331720"/>
+            <a:ext cx="2697480" cy="320040"/>
+          </a:xfrm>
+          <a:prstGeom prst="rect">
+            <a:avLst/>
+          </a:prstGeom>
+          <a:noFill/>
+          <a:ln/>
+        </p:spPr>
+        <p:txBody>
+          <a:bodyPr wrap="square" rtlCol="0" anchor="ctr"/>
+          <a:lstStyle/>
+          <a:p>
+            <a:pPr indent="0" marL="0">
+              <a:buNone/>
+            </a:pPr>
+            <a:r>
+              <a:rPr lang="en-US" sz="1200" dirty="0">
+                <a:solidFill>
+                  <a:srgbClr val="2A303C"/>
+                </a:solidFill>
+                <a:latin typeface="Arial" pitchFamily="34" charset="0"/>
+                <a:ea typeface="Arial" pitchFamily="34" charset="-122"/>
+                <a:cs typeface="Arial" pitchFamily="34" charset="-120"/>
+              </a:rPr>
+              <a:t>Mise en ligne &amp; suivi</a:t>
+            </a:r>
+            <a:endParaRPr lang="en-US" sz="1200" dirty="0"/>
+          </a:p>
+        </p:txBody>
+      </p:sp>
+      <p:sp>
+        <p:nvSpPr>
+          <p:cNvPr id="21" name="Shape 19"/>
+          <p:cNvSpPr/>
+          <p:nvPr/>
+        </p:nvSpPr>
+        <p:spPr>
+          <a:xfrm>
+            <a:off x="640080" y="3108960"/>
+            <a:ext cx="10972800" cy="2560320"/>
+          </a:xfrm>
+          <a:prstGeom prst="rect">
+            <a:avLst/>
+          </a:prstGeom>
+          <a:solidFill>
+            <a:srgbClr val="E9ECF1"/>
+          </a:solidFill>
+          <a:ln/>
+        </p:spPr>
+      </p:sp>
+      <p:sp>
+        <p:nvSpPr>
+          <p:cNvPr id="22" name="Text 20"/>
+          <p:cNvSpPr/>
+          <p:nvPr/>
+        </p:nvSpPr>
+        <p:spPr>
+          <a:xfrm>
+            <a:off x="914400" y="3383280"/>
+            <a:ext cx="10058400" cy="365760"/>
+          </a:xfrm>
+          <a:prstGeom prst="rect">
+            <a:avLst/>
+          </a:prstGeom>
+          <a:noFill/>
+          <a:ln/>
+        </p:spPr>
+        <p:txBody>
+          <a:bodyPr wrap="square" rtlCol="0" anchor="ctr"/>
+          <a:lstStyle/>
+          <a:p>
+            <a:pPr indent="0" marL="0">
+              <a:buNone/>
+            </a:pPr>
+            <a:r>
+              <a:rPr lang="en-US" sz="2000" b="1" dirty="0">
+                <a:solidFill>
+                  <a:srgbClr val="12151C"/>
+                </a:solidFill>
+                <a:latin typeface="Arial" pitchFamily="34" charset="0"/>
+                <a:ea typeface="Arial" pitchFamily="34" charset="-122"/>
+                <a:cs typeface="Arial" pitchFamily="34" charset="-120"/>
+              </a:rPr>
+              <a:t>Darren O'Sullivan — Fondateur</a:t>
+            </a:r>
+            <a:endParaRPr lang="en-US" sz="2000" dirty="0"/>
+          </a:p>
+        </p:txBody>
+      </p:sp>
+      <p:sp>
+        <p:nvSpPr>
+          <p:cNvPr id="23" name="Text 21"/>
+          <p:cNvSpPr/>
+          <p:nvPr/>
+        </p:nvSpPr>
+        <p:spPr>
+          <a:xfrm>
+            <a:off x="914400" y="3886200"/>
+            <a:ext cx="10058400" cy="1463040"/>
+          </a:xfrm>
+          <a:prstGeom prst="rect">
+            <a:avLst/>
+          </a:prstGeom>
+          <a:noFill/>
+          <a:ln/>
+        </p:spPr>
+        <p:txBody>
+          <a:bodyPr wrap="square" rtlCol="0" anchor="ctr"/>
+          <a:lstStyle/>
+          <a:p>
+            <a:pPr indent="0" marL="0">
+              <a:buNone/>
+            </a:pPr>
+            <a:r>
+              <a:rPr lang="en-US" sz="1400" dirty="0">
+                <a:solidFill>
+                  <a:srgbClr val="2A303C"/>
+                </a:solidFill>
+                <a:latin typeface="Arial" pitchFamily="34" charset="0"/>
+                <a:ea typeface="Arial" pitchFamily="34" charset="-122"/>
+                <a:cs typeface="Arial" pitchFamily="34" charset="-120"/>
+              </a:rPr>
+              <a:t>Développeur web orienté produit : interfaces, architectures React / Node.js, livraison d'outils utiles aux entreprises.</a:t>
+            </a:r>
+            <a:endParaRPr lang="en-US" sz="1400" dirty="0"/>
+          </a:p>
+          <a:p>
+            <a:pPr indent="0" marL="0">
+              <a:buNone/>
+            </a:pPr>
+            <a:r>
+              <a:rPr lang="en-US" sz="1400" dirty="0">
+                <a:solidFill>
+                  <a:srgbClr val="2A303C"/>
+                </a:solidFill>
+                <a:latin typeface="Arial" pitchFamily="34" charset="0"/>
+                <a:ea typeface="Arial" pitchFamily="34" charset="-122"/>
+                <a:cs typeface="Arial" pitchFamily="34" charset="-120"/>
+              </a:rPr>
+              <a:t>Compétences : React, Node.js, sites vitrine, UX/UI, bases de données.</a:t>
+            </a:r>
+            <a:endParaRPr lang="en-US" sz="1400" dirty="0"/>
+          </a:p>
+          <a:p>
+            <a:pPr indent="0" marL="0">
+              <a:buNone/>
+            </a:pPr>
+            <a:r>
+              <a:rPr lang="en-US" sz="1400" dirty="0">
+                <a:solidFill>
+                  <a:srgbClr val="2A303C"/>
+                </a:solidFill>
+                <a:latin typeface="Arial" pitchFamily="34" charset="0"/>
+                <a:ea typeface="Arial" pitchFamily="34" charset="-122"/>
+                <a:cs typeface="Arial" pitchFamily="34" charset="-120"/>
+              </a:rPr>
+              <a:t>Posture : micro-entreprise agile, responsabilité totale sur les livrables.</a:t>
+            </a:r>
+            <a:endParaRPr lang="en-US" sz="1400" dirty="0"/>
+          </a:p>
+        </p:txBody>
+      </p:sp>
+      <p:sp>
+        <p:nvSpPr>
+          <p:cNvPr id="24" name="Text 22"/>
+          <p:cNvSpPr/>
+          <p:nvPr/>
+        </p:nvSpPr>
+        <p:spPr>
+          <a:xfrm>
+            <a:off x="548640" y="6446520"/>
+            <a:ext cx="9144000" cy="274320"/>
+          </a:xfrm>
+          <a:prstGeom prst="rect">
+            <a:avLst/>
+          </a:prstGeom>
+          <a:noFill/>
+          <a:ln/>
+        </p:spPr>
+        <p:txBody>
+          <a:bodyPr wrap="square" rtlCol="0" anchor="ctr"/>
+          <a:lstStyle/>
+          <a:p>
+            <a:pPr indent="0" marL="0">
+              <a:buNone/>
+            </a:pPr>
+            <a:r>
+              <a:rPr lang="en-US" sz="1000" dirty="0">
+                <a:solidFill>
+                  <a:srgbClr val="2A303C"/>
+                </a:solidFill>
+                <a:latin typeface="Arial" pitchFamily="34" charset="0"/>
+                <a:ea typeface="Arial" pitchFamily="34" charset="-122"/>
+                <a:cs typeface="Arial" pitchFamily="34" charset="-120"/>
+              </a:rPr>
+              <a:t>ODev — Dossier de création · ODEV-2026-01</a:t>
+            </a:r>
+            <a:endParaRPr lang="en-US" sz="1000" dirty="0"/>
+          </a:p>
+        </p:txBody>
+      </p:sp>
+      <p:sp>
+        <p:nvSpPr>
+          <p:cNvPr id="25" name="Text 23"/>
+          <p:cNvSpPr/>
+          <p:nvPr/>
+        </p:nvSpPr>
+        <p:spPr>
+          <a:xfrm>
+            <a:off x="10241280" y="6446520"/>
+            <a:ext cx="1371600" cy="274320"/>
+          </a:xfrm>
+          <a:prstGeom prst="rect">
+            <a:avLst/>
+          </a:prstGeom>
+          <a:noFill/>
+          <a:ln/>
+        </p:spPr>
+        <p:txBody>
+          <a:bodyPr wrap="square" rtlCol="0" anchor="ctr"/>
+          <a:lstStyle/>
+          <a:p>
+            <a:pPr algn="r" indent="0" marL="0">
+              <a:buNone/>
+            </a:pPr>
+            <a:r>
+              <a:rPr lang="en-US" sz="1000" dirty="0">
+                <a:solidFill>
+                  <a:srgbClr val="2A303C"/>
+                </a:solidFill>
+                <a:latin typeface="Arial" pitchFamily="34" charset="0"/>
+                <a:ea typeface="Arial" pitchFamily="34" charset="-122"/>
+                <a:cs typeface="Arial" pitchFamily="34" charset="-120"/>
+              </a:rPr>
+              <a:t>12 / 13</a:t>
+            </a:r>
+            <a:endParaRPr lang="en-US" sz="1000" dirty="0"/>
+          </a:p>
+        </p:txBody>
+      </p:sp>
+    </p:spTree>
+  </p:cSld>
+  <p:clrMapOvr>
+    <a:masterClrMapping/>
+  </p:clrMapOvr>
+</p:sld>
+</file>
+
+<file path=ppt/slides/slide13.xml><?xml version="1.0" encoding="utf-8"?>
+<p:sld xmlns:a="http://schemas.openxmlformats.org/drawingml/2006/main" xmlns:r="http://schemas.openxmlformats.org/officeDocument/2006/relationships" xmlns:p="http://schemas.openxmlformats.org/presentationml/2006/main">
+  <p:cSld name="Slide 13">
+    <p:spTree>
+      <p:nvGrpSpPr>
+        <p:cNvPr id="1" name=""/>
+        <p:cNvGrpSpPr/>
+        <p:nvPr/>
+      </p:nvGrpSpPr>
+      <p:grpSpPr>
+        <a:xfrm>
+          <a:off x="0" y="0"/>
+          <a:ext cx="0" cy="0"/>
+          <a:chOff x="0" y="0"/>
+          <a:chExt cx="0" cy="0"/>
+        </a:xfrm>
+      </p:grpSpPr>
+      <p:sp>
+        <p:nvSpPr>
+          <p:cNvPr id="2" name="Shape 0"/>
+          <p:cNvSpPr/>
+          <p:nvPr/>
+        </p:nvSpPr>
+        <p:spPr>
+          <a:xfrm>
+            <a:off x="0" y="0"/>
+            <a:ext cx="12191695" cy="6858000"/>
+          </a:xfrm>
+          <a:prstGeom prst="rect">
+            <a:avLst/>
+          </a:prstGeom>
+          <a:solidFill>
+            <a:srgbClr val="E9ECF1"/>
+          </a:solidFill>
+          <a:ln/>
+        </p:spPr>
+      </p:sp>
+      <p:sp>
+        <p:nvSpPr>
+          <p:cNvPr id="3" name="Shape 1"/>
+          <p:cNvSpPr/>
+          <p:nvPr/>
+        </p:nvSpPr>
+        <p:spPr>
+          <a:xfrm>
+            <a:off x="0" y="0"/>
+            <a:ext cx="12191695" cy="109728"/>
+          </a:xfrm>
+          <a:prstGeom prst="rect">
+            <a:avLst/>
+          </a:prstGeom>
+          <a:solidFill>
+            <a:srgbClr val="E63312"/>
+          </a:solidFill>
+          <a:ln/>
+        </p:spPr>
+      </p:sp>
+      <p:sp>
+        <p:nvSpPr>
+          <p:cNvPr id="4" name="Text 2"/>
+          <p:cNvSpPr/>
+          <p:nvPr/>
+        </p:nvSpPr>
+        <p:spPr>
+          <a:xfrm>
+            <a:off x="640080" y="411480"/>
+            <a:ext cx="10972800" cy="274320"/>
+          </a:xfrm>
+          <a:prstGeom prst="rect">
+            <a:avLst/>
+          </a:prstGeom>
+          <a:noFill/>
+          <a:ln/>
+        </p:spPr>
+        <p:txBody>
+          <a:bodyPr wrap="square" rtlCol="0" anchor="ctr"/>
+          <a:lstStyle/>
+          <a:p>
+            <a:pPr indent="0" marL="0">
+              <a:buNone/>
+            </a:pPr>
+            <a:r>
+              <a:rPr lang="en-US" sz="1100" b="1" spc="400" kern="0" dirty="0">
+                <a:solidFill>
+                  <a:srgbClr val="E63312"/>
+                </a:solidFill>
+                <a:latin typeface="Arial" pitchFamily="34" charset="0"/>
+                <a:ea typeface="Arial" pitchFamily="34" charset="-122"/>
+                <a:cs typeface="Arial" pitchFamily="34" charset="-120"/>
+              </a:rPr>
+              <a:t>07 — DEMANDE</a:t>
+            </a:r>
+            <a:endParaRPr lang="en-US" sz="1100" dirty="0"/>
+          </a:p>
+        </p:txBody>
+      </p:sp>
+      <p:sp>
+        <p:nvSpPr>
+          <p:cNvPr id="5" name="Text 3"/>
+          <p:cNvSpPr/>
+          <p:nvPr/>
+        </p:nvSpPr>
+        <p:spPr>
+          <a:xfrm>
+            <a:off x="640080" y="822960"/>
+            <a:ext cx="10972800" cy="502920"/>
+          </a:xfrm>
+          <a:prstGeom prst="rect">
+            <a:avLst/>
+          </a:prstGeom>
+          <a:noFill/>
+          <a:ln/>
+        </p:spPr>
+        <p:txBody>
+          <a:bodyPr wrap="square" rtlCol="0" anchor="ctr"/>
+          <a:lstStyle/>
+          <a:p>
+            <a:pPr indent="0" marL="0">
+              <a:buNone/>
+            </a:pPr>
+            <a:r>
+              <a:rPr lang="en-US" sz="3400" b="1" dirty="0">
+                <a:solidFill>
+                  <a:srgbClr val="12151C"/>
+                </a:solidFill>
+                <a:latin typeface="Arial" pitchFamily="34" charset="0"/>
+                <a:ea typeface="Arial" pitchFamily="34" charset="-122"/>
+                <a:cs typeface="Arial" pitchFamily="34" charset="-120"/>
+              </a:rPr>
+              <a:t>Demande d'ouverture</a:t>
+            </a:r>
+            <a:endParaRPr lang="en-US" sz="3400" dirty="0"/>
+          </a:p>
+        </p:txBody>
+      </p:sp>
+      <p:sp>
+        <p:nvSpPr>
+          <p:cNvPr id="6" name="Text 4"/>
+          <p:cNvSpPr/>
+          <p:nvPr/>
+        </p:nvSpPr>
+        <p:spPr>
+          <a:xfrm>
+            <a:off x="640080" y="1508760"/>
+            <a:ext cx="10789920" cy="1188720"/>
+          </a:xfrm>
+          <a:prstGeom prst="rect">
+            <a:avLst/>
+          </a:prstGeom>
+          <a:noFill/>
+          <a:ln/>
+        </p:spPr>
+        <p:txBody>
+          <a:bodyPr wrap="square" rtlCol="0" anchor="ctr"/>
+          <a:lstStyle/>
+          <a:p>
+            <a:pPr indent="0" marL="0">
+              <a:buNone/>
+            </a:pPr>
+            <a:r>
+              <a:rPr lang="en-US" sz="1600" dirty="0">
+                <a:solidFill>
+                  <a:srgbClr val="2A303C"/>
+                </a:solidFill>
+                <a:latin typeface="Arial" pitchFamily="34" charset="0"/>
+                <a:ea typeface="Arial" pitchFamily="34" charset="-122"/>
+                <a:cs typeface="Arial" pitchFamily="34" charset="-120"/>
+              </a:rPr>
+              <a:t>Par le présent dossier, Darren O'Sullivan sollicite l'enregistrement et la reconnaissance de l'activité ODev en tant que micro-entreprise de services numériques, afin d'exercer légalement les prestations décrites au profit des entreprises et organisations du territoire.</a:t>
+            </a:r>
+            <a:endParaRPr lang="en-US" sz="1600" dirty="0"/>
+          </a:p>
+        </p:txBody>
+      </p:sp>
+      <p:sp>
+        <p:nvSpPr>
+          <p:cNvPr id="7" name="Shape 5"/>
+          <p:cNvSpPr/>
+          <p:nvPr/>
+        </p:nvSpPr>
+        <p:spPr>
+          <a:xfrm>
+            <a:off x="640080" y="2926080"/>
+            <a:ext cx="10881360" cy="2377440"/>
+          </a:xfrm>
+          <a:prstGeom prst="rect">
+            <a:avLst/>
+          </a:prstGeom>
+          <a:solidFill>
+            <a:srgbClr val="FFFFFF"/>
+          </a:solidFill>
+          <a:ln w="12700">
+            <a:solidFill>
+              <a:srgbClr val="C8CED8"/>
+            </a:solidFill>
+            <a:prstDash val="solid"/>
+          </a:ln>
+        </p:spPr>
+      </p:sp>
+      <p:sp>
+        <p:nvSpPr>
+          <p:cNvPr id="8" name="Text 6"/>
+          <p:cNvSpPr/>
+          <p:nvPr/>
+        </p:nvSpPr>
+        <p:spPr>
+          <a:xfrm>
+            <a:off x="1005840" y="3200400"/>
+            <a:ext cx="10058400" cy="822960"/>
+          </a:xfrm>
+          <a:prstGeom prst="rect">
+            <a:avLst/>
+          </a:prstGeom>
+          <a:noFill/>
+          <a:ln/>
+        </p:spPr>
+        <p:txBody>
+          <a:bodyPr wrap="square" rtlCol="0" anchor="ctr"/>
+          <a:lstStyle/>
+          <a:p>
+            <a:pPr indent="0" marL="0">
+              <a:buNone/>
+            </a:pPr>
+            <a:r>
+              <a:rPr lang="en-US" sz="1500" dirty="0">
+                <a:solidFill>
+                  <a:srgbClr val="2A303C"/>
+                </a:solidFill>
+                <a:latin typeface="Arial" pitchFamily="34" charset="0"/>
+                <a:ea typeface="Arial" pitchFamily="34" charset="-122"/>
+                <a:cs typeface="Arial" pitchFamily="34" charset="-120"/>
+              </a:rPr>
+              <a:t>ODev s'engage à exercer dans le respect des règles applicables, avec sérieux, transparence et contribution positive à l'écosystème économique local.</a:t>
+            </a:r>
+            <a:endParaRPr lang="en-US" sz="1500" dirty="0"/>
+          </a:p>
+        </p:txBody>
+      </p:sp>
+      <p:sp>
+        <p:nvSpPr>
+          <p:cNvPr id="9" name="Text 7"/>
+          <p:cNvSpPr/>
+          <p:nvPr/>
+        </p:nvSpPr>
+        <p:spPr>
+          <a:xfrm>
+            <a:off x="1005840" y="4160520"/>
+            <a:ext cx="5486400" cy="320040"/>
+          </a:xfrm>
+          <a:prstGeom prst="rect">
+            <a:avLst/>
+          </a:prstGeom>
+          <a:noFill/>
+          <a:ln/>
+        </p:spPr>
+        <p:txBody>
+          <a:bodyPr wrap="square" rtlCol="0" anchor="ctr"/>
+          <a:lstStyle/>
+          <a:p>
+            <a:pPr indent="0" marL="0">
+              <a:buNone/>
+            </a:pPr>
+            <a:r>
+              <a:rPr lang="en-US" sz="1800" b="1" dirty="0">
+                <a:solidFill>
+                  <a:srgbClr val="12151C"/>
+                </a:solidFill>
+                <a:latin typeface="Arial" pitchFamily="34" charset="0"/>
+                <a:ea typeface="Arial" pitchFamily="34" charset="-122"/>
+                <a:cs typeface="Arial" pitchFamily="34" charset="-120"/>
+              </a:rPr>
+              <a:t>Darren O'Sullivan</a:t>
+            </a:r>
+            <a:endParaRPr lang="en-US" sz="1800" dirty="0"/>
+          </a:p>
+        </p:txBody>
+      </p:sp>
+      <p:sp>
+        <p:nvSpPr>
+          <p:cNvPr id="10" name="Text 8">
+            <a:hlinkClick r:id="rId1" tooltip=""/>
+          </p:cNvPr>
+          <p:cNvSpPr/>
+          <p:nvPr/>
+        </p:nvSpPr>
+        <p:spPr>
+          <a:xfrm>
+            <a:off x="1005840" y="4526280"/>
+            <a:ext cx="9144000" cy="274320"/>
+          </a:xfrm>
+          <a:prstGeom prst="rect">
+            <a:avLst/>
+          </a:prstGeom>
+          <a:noFill/>
+          <a:ln/>
+        </p:spPr>
+        <p:txBody>
+          <a:bodyPr wrap="square" rtlCol="0" anchor="ctr"/>
+          <a:lstStyle/>
+          <a:p>
+            <a:pPr indent="0" marL="0">
+              <a:buNone/>
+            </a:pPr>
+            <a:r>
+              <a:rPr lang="en-US" sz="1300" u="sng" dirty="0">
+                <a:solidFill>
+                  <a:srgbClr val="2A303C"/>
+                </a:solidFill>
+                <a:latin typeface="Arial" pitchFamily="34" charset="0"/>
+                <a:ea typeface="Arial" pitchFamily="34" charset="-122"/>
+                <a:cs typeface="Arial" pitchFamily="34" charset="-120"/>
+                <a:hlinkClick r:id="rId1" invalidUrl="" action="" tgtFrame="" tooltip="" history="1" highlightClick="0" endSnd="0">
+                  <a:extLst>
+                    <a:ext uri="{A12FA001-AC4F-418D-AE19-62706E023703}">
+                      <ahyp:hlinkClr xmlns:ahyp="http://schemas.microsoft.com/office/drawing/2018/hyperlinkcolor" val="tx"/>
+                    </a:ext>
+                  </a:extLst>
+                </a:hlinkClick>
+              </a:rPr>
+              <a:t>Fondateur — ODev    ·    https://odev.kodyalabs.fr/</a:t>
+            </a:r>
+            <a:endParaRPr lang="en-US" sz="1300" dirty="0"/>
+          </a:p>
+        </p:txBody>
+      </p:sp>
+      <p:sp>
+        <p:nvSpPr>
+          <p:cNvPr id="11" name="Text 9"/>
+          <p:cNvSpPr/>
+          <p:nvPr/>
+        </p:nvSpPr>
+        <p:spPr>
+          <a:xfrm>
+            <a:off x="548640" y="6446520"/>
+            <a:ext cx="9144000" cy="274320"/>
+          </a:xfrm>
+          <a:prstGeom prst="rect">
+            <a:avLst/>
+          </a:prstGeom>
+          <a:noFill/>
+          <a:ln/>
+        </p:spPr>
+        <p:txBody>
+          <a:bodyPr wrap="square" rtlCol="0" anchor="ctr"/>
+          <a:lstStyle/>
+          <a:p>
+            <a:pPr indent="0" marL="0">
+              <a:buNone/>
+            </a:pPr>
+            <a:r>
+              <a:rPr lang="en-US" sz="1000" dirty="0">
+                <a:solidFill>
+                  <a:srgbClr val="2A303C"/>
+                </a:solidFill>
+                <a:latin typeface="Arial" pitchFamily="34" charset="0"/>
+                <a:ea typeface="Arial" pitchFamily="34" charset="-122"/>
+                <a:cs typeface="Arial" pitchFamily="34" charset="-120"/>
+              </a:rPr>
+              <a:t>ODev — Dossier de création · ODEV-2026-01</a:t>
+            </a:r>
+            <a:endParaRPr lang="en-US" sz="1000" dirty="0"/>
+          </a:p>
+        </p:txBody>
+      </p:sp>
+      <p:sp>
+        <p:nvSpPr>
+          <p:cNvPr id="12" name="Text 10"/>
+          <p:cNvSpPr/>
+          <p:nvPr/>
+        </p:nvSpPr>
+        <p:spPr>
+          <a:xfrm>
+            <a:off x="10241280" y="6446520"/>
+            <a:ext cx="1371600" cy="274320"/>
+          </a:xfrm>
+          <a:prstGeom prst="rect">
+            <a:avLst/>
+          </a:prstGeom>
+          <a:noFill/>
+          <a:ln/>
+        </p:spPr>
+        <p:txBody>
+          <a:bodyPr wrap="square" rtlCol="0" anchor="ctr"/>
+          <a:lstStyle/>
+          <a:p>
+            <a:pPr algn="r" indent="0" marL="0">
+              <a:buNone/>
+            </a:pPr>
+            <a:r>
+              <a:rPr lang="en-US" sz="1000" dirty="0">
+                <a:solidFill>
+                  <a:srgbClr val="2A303C"/>
+                </a:solidFill>
+                <a:latin typeface="Arial" pitchFamily="34" charset="0"/>
+                <a:ea typeface="Arial" pitchFamily="34" charset="-122"/>
+                <a:cs typeface="Arial" pitchFamily="34" charset="-120"/>
+              </a:rPr>
+              <a:t>13 / 13</a:t>
+            </a:r>
+            <a:endParaRPr lang="en-US" sz="1000" dirty="0"/>
+          </a:p>
+        </p:txBody>
+      </p:sp>
+    </p:spTree>
+  </p:cSld>
+  <p:clrMapOvr>
+    <a:masterClrMapping/>
+  </p:clrMapOvr>
+</p:sld>
+</file>
+
 <file path=ppt/slides/slide2.xml><?xml version="1.0" encoding="utf-8"?>
 <p:sld xmlns:a="http://schemas.openxmlformats.org/drawingml/2006/main" xmlns:r="http://schemas.openxmlformats.org/officeDocument/2006/relationships" xmlns:p="http://schemas.openxmlformats.org/presentationml/2006/main">
   <p:cSld name="Slide 2">
@@ -2299,7 +5311,7 @@
                 <a:ea typeface="Arial" pitchFamily="34" charset="-122"/>
                 <a:cs typeface="Arial" pitchFamily="34" charset="-120"/>
               </a:rPr>
-              <a:t>02 / 08</a:t>
+              <a:t>02 / 13</a:t>
             </a:r>
             <a:endParaRPr lang="en-US" sz="1000" dirty="0"/>
           </a:p>
@@ -2784,7 +5796,7 @@
                 <a:ea typeface="Arial" pitchFamily="34" charset="-122"/>
                 <a:cs typeface="Arial" pitchFamily="34" charset="-120"/>
               </a:rPr>
-              <a:t>03 / 08</a:t>
+              <a:t>03 / 13</a:t>
             </a:r>
             <a:endParaRPr lang="en-US" sz="1000" dirty="0"/>
           </a:p>
@@ -3377,7 +6389,7 @@
                 <a:ea typeface="Arial" pitchFamily="34" charset="-122"/>
                 <a:cs typeface="Arial" pitchFamily="34" charset="-120"/>
               </a:rPr>
-              <a:t>04 / 08</a:t>
+              <a:t>04 / 13</a:t>
             </a:r>
             <a:endParaRPr lang="en-US" sz="1000" dirty="0"/>
           </a:p>
@@ -4163,7 +7175,7 @@
                 <a:ea typeface="Arial" pitchFamily="34" charset="-122"/>
                 <a:cs typeface="Arial" pitchFamily="34" charset="-120"/>
               </a:rPr>
-              <a:t>05 / 08</a:t>
+              <a:t>05 / 13</a:t>
             </a:r>
             <a:endParaRPr lang="en-US" sz="1000" dirty="0"/>
           </a:p>
@@ -4222,24 +7234,24 @@
         </p:nvSpPr>
         <p:spPr>
           <a:xfrm>
-            <a:off x="640080" y="411480"/>
-            <a:ext cx="10972800" cy="274320"/>
-          </a:xfrm>
-          <a:prstGeom prst="rect">
-            <a:avLst/>
-          </a:prstGeom>
-          <a:noFill/>
-          <a:ln/>
-        </p:spPr>
-        <p:txBody>
-          <a:bodyPr wrap="square" rtlCol="0" anchor="ctr"/>
-          <a:lstStyle/>
-          <a:p>
-            <a:pPr indent="0" marL="0">
-              <a:buNone/>
-            </a:pPr>
-            <a:r>
-              <a:rPr lang="en-US" sz="1100" b="1" spc="300" kern="0" dirty="0">
+            <a:off x="640080" y="2011680"/>
+            <a:ext cx="10972800" cy="320040"/>
+          </a:xfrm>
+          <a:prstGeom prst="rect">
+            <a:avLst/>
+          </a:prstGeom>
+          <a:noFill/>
+          <a:ln/>
+        </p:spPr>
+        <p:txBody>
+          <a:bodyPr wrap="square" rtlCol="0" anchor="ctr"/>
+          <a:lstStyle/>
+          <a:p>
+            <a:pPr indent="0" marL="0">
+              <a:buNone/>
+            </a:pPr>
+            <a:r>
+              <a:rPr lang="en-US" sz="1200" b="1" spc="300" kern="0" dirty="0">
                 <a:solidFill>
                   <a:srgbClr val="E63312"/>
                 </a:solidFill>
@@ -4247,9 +7259,9 @@
                 <a:ea typeface="Arial" pitchFamily="34" charset="-122"/>
                 <a:cs typeface="Arial" pitchFamily="34" charset="-120"/>
               </a:rPr>
-              <a:t>04 — MARCHÉ &amp; IMPACT</a:t>
-            </a:r>
-            <a:endParaRPr lang="en-US" sz="1100" dirty="0"/>
+              <a:t>04 — RÉALISATIONS</a:t>
+            </a:r>
+            <a:endParaRPr lang="en-US" sz="1200" dirty="0"/>
           </a:p>
         </p:txBody>
       </p:sp>
@@ -4261,24 +7273,24 @@
         </p:nvSpPr>
         <p:spPr>
           <a:xfrm>
-            <a:off x="640080" y="822960"/>
-            <a:ext cx="10972800" cy="502920"/>
-          </a:xfrm>
-          <a:prstGeom prst="rect">
-            <a:avLst/>
-          </a:prstGeom>
-          <a:noFill/>
-          <a:ln/>
-        </p:spPr>
-        <p:txBody>
-          <a:bodyPr wrap="square" rtlCol="0" anchor="ctr"/>
-          <a:lstStyle/>
-          <a:p>
-            <a:pPr indent="0" marL="0">
-              <a:buNone/>
-            </a:pPr>
-            <a:r>
-              <a:rPr lang="en-US" sz="3400" b="1" dirty="0">
+            <a:off x="640080" y="2468880"/>
+            <a:ext cx="10972800" cy="640080"/>
+          </a:xfrm>
+          <a:prstGeom prst="rect">
+            <a:avLst/>
+          </a:prstGeom>
+          <a:noFill/>
+          <a:ln/>
+        </p:spPr>
+        <p:txBody>
+          <a:bodyPr wrap="square" rtlCol="0" anchor="ctr"/>
+          <a:lstStyle/>
+          <a:p>
+            <a:pPr indent="0" marL="0">
+              <a:buNone/>
+            </a:pPr>
+            <a:r>
+              <a:rPr lang="en-US" sz="4000" b="1" dirty="0">
                 <a:solidFill>
                   <a:srgbClr val="FFFFFF"/>
                 </a:solidFill>
@@ -4286,9 +7298,9 @@
                 <a:ea typeface="Arial" pitchFamily="34" charset="-122"/>
                 <a:cs typeface="Arial" pitchFamily="34" charset="-120"/>
               </a:rPr>
-              <a:t>À qui s'adresse ODev ?</a:t>
-            </a:r>
-            <a:endParaRPr lang="en-US" sz="3400" dirty="0"/>
+              <a:t>Preuves de savoir-faire</a:t>
+            </a:r>
+            <a:endParaRPr lang="en-US" sz="4000" dirty="0"/>
           </a:p>
         </p:txBody>
       </p:sp>
@@ -4300,24 +7312,24 @@
         </p:nvSpPr>
         <p:spPr>
           <a:xfrm>
-            <a:off x="640080" y="1417320"/>
-            <a:ext cx="10515600" cy="548640"/>
-          </a:xfrm>
-          <a:prstGeom prst="rect">
-            <a:avLst/>
-          </a:prstGeom>
-          <a:noFill/>
-          <a:ln/>
-        </p:spPr>
-        <p:txBody>
-          <a:bodyPr wrap="square" rtlCol="0" anchor="ctr"/>
-          <a:lstStyle/>
-          <a:p>
-            <a:pPr indent="0" marL="0">
-              <a:buNone/>
-            </a:pPr>
-            <a:r>
-              <a:rPr lang="en-US" sz="1500" dirty="0">
+            <a:off x="640080" y="3200400"/>
+            <a:ext cx="10058400" cy="640080"/>
+          </a:xfrm>
+          <a:prstGeom prst="rect">
+            <a:avLst/>
+          </a:prstGeom>
+          <a:noFill/>
+          <a:ln/>
+        </p:spPr>
+        <p:txBody>
+          <a:bodyPr wrap="square" rtlCol="0" anchor="ctr"/>
+          <a:lstStyle/>
+          <a:p>
+            <a:pPr indent="0" marL="0">
+              <a:buNone/>
+            </a:pPr>
+            <a:r>
+              <a:rPr lang="en-US" sz="1600" dirty="0">
                 <a:solidFill>
                   <a:srgbClr val="A8B0BC"/>
                 </a:solidFill>
@@ -4325,71 +7337,7 @@
                 <a:ea typeface="Arial" pitchFamily="34" charset="-122"/>
                 <a:cs typeface="Arial" pitchFamily="34" charset="-120"/>
               </a:rPr>
-              <a:t>Commerces, professions libérales, associations, TPE/PME et organisations qui veulent une présence numérique nette.</a:t>
-            </a:r>
-            <a:endParaRPr lang="en-US" sz="1500" dirty="0"/>
-          </a:p>
-        </p:txBody>
-      </p:sp>
-      <p:sp>
-        <p:nvSpPr>
-          <p:cNvPr id="6" name="Shape 4"/>
-          <p:cNvSpPr/>
-          <p:nvPr/>
-        </p:nvSpPr>
-        <p:spPr>
-          <a:xfrm>
-            <a:off x="640080" y="2286000"/>
-            <a:ext cx="3566160" cy="2286000"/>
-          </a:xfrm>
-          <a:prstGeom prst="rect">
-            <a:avLst/>
-          </a:prstGeom>
-          <a:solidFill>
-            <a:srgbClr val="1C222C"/>
-          </a:solidFill>
-          <a:ln w="12700">
-            <a:solidFill>
-              <a:srgbClr val="2A3340"/>
-            </a:solidFill>
-            <a:prstDash val="solid"/>
-          </a:ln>
-        </p:spPr>
-      </p:sp>
-      <p:sp>
-        <p:nvSpPr>
-          <p:cNvPr id="7" name="Text 5"/>
-          <p:cNvSpPr/>
-          <p:nvPr/>
-        </p:nvSpPr>
-        <p:spPr>
-          <a:xfrm>
-            <a:off x="868680" y="2514600"/>
-            <a:ext cx="3108960" cy="365760"/>
-          </a:xfrm>
-          <a:prstGeom prst="rect">
-            <a:avLst/>
-          </a:prstGeom>
-          <a:noFill/>
-          <a:ln/>
-        </p:spPr>
-        <p:txBody>
-          <a:bodyPr wrap="square" rtlCol="0" anchor="ctr"/>
-          <a:lstStyle/>
-          <a:p>
-            <a:pPr indent="0" marL="0">
-              <a:buNone/>
-            </a:pPr>
-            <a:r>
-              <a:rPr lang="en-US" sz="1600" b="1" dirty="0">
-                <a:solidFill>
-                  <a:srgbClr val="FFFFFF"/>
-                </a:solidFill>
-                <a:latin typeface="Arial" pitchFamily="34" charset="0"/>
-                <a:ea typeface="Arial" pitchFamily="34" charset="-122"/>
-                <a:cs typeface="Arial" pitchFamily="34" charset="-120"/>
-              </a:rPr>
-              <a:t>Clients cibles</a:t>
+              <a:t>Trois livrables web conçus et mis en ligne — vitrine studio, immobilier, cabinet professionnel.</a:t>
             </a:r>
             <a:endParaRPr lang="en-US" sz="1600" dirty="0"/>
           </a:p>
@@ -4397,252 +7345,7 @@
       </p:sp>
       <p:sp>
         <p:nvSpPr>
-          <p:cNvPr id="8" name="Text 6"/>
-          <p:cNvSpPr/>
-          <p:nvPr/>
-        </p:nvSpPr>
-        <p:spPr>
-          <a:xfrm>
-            <a:off x="868680" y="3017520"/>
-            <a:ext cx="3108960" cy="1280160"/>
-          </a:xfrm>
-          <a:prstGeom prst="rect">
-            <a:avLst/>
-          </a:prstGeom>
-          <a:noFill/>
-          <a:ln/>
-        </p:spPr>
-        <p:txBody>
-          <a:bodyPr wrap="square" rtlCol="0" anchor="ctr"/>
-          <a:lstStyle/>
-          <a:p>
-            <a:pPr indent="0" marL="0">
-              <a:buNone/>
-            </a:pPr>
-            <a:r>
-              <a:rPr lang="en-US" sz="1300" dirty="0">
-                <a:solidFill>
-                  <a:srgbClr val="A8B0BC"/>
-                </a:solidFill>
-                <a:latin typeface="Arial" pitchFamily="34" charset="0"/>
-                <a:ea typeface="Arial" pitchFamily="34" charset="-122"/>
-                <a:cs typeface="Arial" pitchFamily="34" charset="-120"/>
-              </a:rPr>
-              <a:t>Entreprises locales, indépendants, structures en création ou modernisation digitale.</a:t>
-            </a:r>
-            <a:endParaRPr lang="en-US" sz="1300" dirty="0"/>
-          </a:p>
-        </p:txBody>
-      </p:sp>
-      <p:sp>
-        <p:nvSpPr>
-          <p:cNvPr id="9" name="Shape 7"/>
-          <p:cNvSpPr/>
-          <p:nvPr/>
-        </p:nvSpPr>
-        <p:spPr>
-          <a:xfrm>
-            <a:off x="4389120" y="2286000"/>
-            <a:ext cx="3566160" cy="2286000"/>
-          </a:xfrm>
-          <a:prstGeom prst="rect">
-            <a:avLst/>
-          </a:prstGeom>
-          <a:solidFill>
-            <a:srgbClr val="1C222C"/>
-          </a:solidFill>
-          <a:ln w="12700">
-            <a:solidFill>
-              <a:srgbClr val="2A3340"/>
-            </a:solidFill>
-            <a:prstDash val="solid"/>
-          </a:ln>
-        </p:spPr>
-      </p:sp>
-      <p:sp>
-        <p:nvSpPr>
-          <p:cNvPr id="10" name="Text 8"/>
-          <p:cNvSpPr/>
-          <p:nvPr/>
-        </p:nvSpPr>
-        <p:spPr>
-          <a:xfrm>
-            <a:off x="4617720" y="2514600"/>
-            <a:ext cx="3108960" cy="365760"/>
-          </a:xfrm>
-          <a:prstGeom prst="rect">
-            <a:avLst/>
-          </a:prstGeom>
-          <a:noFill/>
-          <a:ln/>
-        </p:spPr>
-        <p:txBody>
-          <a:bodyPr wrap="square" rtlCol="0" anchor="ctr"/>
-          <a:lstStyle/>
-          <a:p>
-            <a:pPr indent="0" marL="0">
-              <a:buNone/>
-            </a:pPr>
-            <a:r>
-              <a:rPr lang="en-US" sz="1600" b="1" dirty="0">
-                <a:solidFill>
-                  <a:srgbClr val="FFFFFF"/>
-                </a:solidFill>
-                <a:latin typeface="Arial" pitchFamily="34" charset="0"/>
-                <a:ea typeface="Arial" pitchFamily="34" charset="-122"/>
-                <a:cs typeface="Arial" pitchFamily="34" charset="-120"/>
-              </a:rPr>
-              <a:t>Besoin couvert</a:t>
-            </a:r>
-            <a:endParaRPr lang="en-US" sz="1600" dirty="0"/>
-          </a:p>
-        </p:txBody>
-      </p:sp>
-      <p:sp>
-        <p:nvSpPr>
-          <p:cNvPr id="11" name="Text 9"/>
-          <p:cNvSpPr/>
-          <p:nvPr/>
-        </p:nvSpPr>
-        <p:spPr>
-          <a:xfrm>
-            <a:off x="4617720" y="3017520"/>
-            <a:ext cx="3108960" cy="1280160"/>
-          </a:xfrm>
-          <a:prstGeom prst="rect">
-            <a:avLst/>
-          </a:prstGeom>
-          <a:noFill/>
-          <a:ln/>
-        </p:spPr>
-        <p:txBody>
-          <a:bodyPr wrap="square" rtlCol="0" anchor="ctr"/>
-          <a:lstStyle/>
-          <a:p>
-            <a:pPr indent="0" marL="0">
-              <a:buNone/>
-            </a:pPr>
-            <a:r>
-              <a:rPr lang="en-US" sz="1300" dirty="0">
-                <a:solidFill>
-                  <a:srgbClr val="A8B0BC"/>
-                </a:solidFill>
-                <a:latin typeface="Arial" pitchFamily="34" charset="0"/>
-                <a:ea typeface="Arial" pitchFamily="34" charset="-122"/>
-                <a:cs typeface="Arial" pitchFamily="34" charset="-120"/>
-              </a:rPr>
-              <a:t>Visibilité, conversion, organisation interne et outils sur mesure.</a:t>
-            </a:r>
-            <a:endParaRPr lang="en-US" sz="1300" dirty="0"/>
-          </a:p>
-        </p:txBody>
-      </p:sp>
-      <p:sp>
-        <p:nvSpPr>
-          <p:cNvPr id="12" name="Shape 10"/>
-          <p:cNvSpPr/>
-          <p:nvPr/>
-        </p:nvSpPr>
-        <p:spPr>
-          <a:xfrm>
-            <a:off x="8138160" y="2286000"/>
-            <a:ext cx="3566160" cy="2286000"/>
-          </a:xfrm>
-          <a:prstGeom prst="rect">
-            <a:avLst/>
-          </a:prstGeom>
-          <a:solidFill>
-            <a:srgbClr val="1C222C"/>
-          </a:solidFill>
-          <a:ln w="12700">
-            <a:solidFill>
-              <a:srgbClr val="2A3340"/>
-            </a:solidFill>
-            <a:prstDash val="solid"/>
-          </a:ln>
-        </p:spPr>
-      </p:sp>
-      <p:sp>
-        <p:nvSpPr>
-          <p:cNvPr id="13" name="Text 11"/>
-          <p:cNvSpPr/>
-          <p:nvPr/>
-        </p:nvSpPr>
-        <p:spPr>
-          <a:xfrm>
-            <a:off x="8366760" y="2514600"/>
-            <a:ext cx="3108960" cy="365760"/>
-          </a:xfrm>
-          <a:prstGeom prst="rect">
-            <a:avLst/>
-          </a:prstGeom>
-          <a:noFill/>
-          <a:ln/>
-        </p:spPr>
-        <p:txBody>
-          <a:bodyPr wrap="square" rtlCol="0" anchor="ctr"/>
-          <a:lstStyle/>
-          <a:p>
-            <a:pPr indent="0" marL="0">
-              <a:buNone/>
-            </a:pPr>
-            <a:r>
-              <a:rPr lang="en-US" sz="1600" b="1" dirty="0">
-                <a:solidFill>
-                  <a:srgbClr val="FFFFFF"/>
-                </a:solidFill>
-                <a:latin typeface="Arial" pitchFamily="34" charset="0"/>
-                <a:ea typeface="Arial" pitchFamily="34" charset="-122"/>
-                <a:cs typeface="Arial" pitchFamily="34" charset="-120"/>
-              </a:rPr>
-              <a:t>Impact attendu</a:t>
-            </a:r>
-            <a:endParaRPr lang="en-US" sz="1600" dirty="0"/>
-          </a:p>
-        </p:txBody>
-      </p:sp>
-      <p:sp>
-        <p:nvSpPr>
-          <p:cNvPr id="14" name="Text 12"/>
-          <p:cNvSpPr/>
-          <p:nvPr/>
-        </p:nvSpPr>
-        <p:spPr>
-          <a:xfrm>
-            <a:off x="8366760" y="3017520"/>
-            <a:ext cx="3108960" cy="1280160"/>
-          </a:xfrm>
-          <a:prstGeom prst="rect">
-            <a:avLst/>
-          </a:prstGeom>
-          <a:noFill/>
-          <a:ln/>
-        </p:spPr>
-        <p:txBody>
-          <a:bodyPr wrap="square" rtlCol="0" anchor="ctr"/>
-          <a:lstStyle/>
-          <a:p>
-            <a:pPr indent="0" marL="0">
-              <a:buNone/>
-            </a:pPr>
-            <a:r>
-              <a:rPr lang="en-US" sz="1300" dirty="0">
-                <a:solidFill>
-                  <a:srgbClr val="A8B0BC"/>
-                </a:solidFill>
-                <a:latin typeface="Arial" pitchFamily="34" charset="0"/>
-                <a:ea typeface="Arial" pitchFamily="34" charset="-122"/>
-                <a:cs typeface="Arial" pitchFamily="34" charset="-120"/>
-              </a:rPr>
-              <a:t>Accès à des services numériques professionnels pour le tissu économique local.</a:t>
-            </a:r>
-            <a:endParaRPr lang="en-US" sz="1300" dirty="0"/>
-          </a:p>
-        </p:txBody>
-      </p:sp>
-      <p:sp>
-        <p:nvSpPr>
-          <p:cNvPr id="15" name="Text 13"/>
+          <p:cNvPr id="6" name="Text 4"/>
           <p:cNvSpPr/>
           <p:nvPr/>
         </p:nvSpPr>
@@ -4681,7 +7384,7 @@
       </p:sp>
       <p:sp>
         <p:nvSpPr>
-          <p:cNvPr id="16" name="Text 14"/>
+          <p:cNvPr id="7" name="Text 5"/>
           <p:cNvSpPr/>
           <p:nvPr/>
         </p:nvSpPr>
@@ -4712,7 +7415,7 @@
                 <a:ea typeface="Arial" pitchFamily="34" charset="-122"/>
                 <a:cs typeface="Arial" pitchFamily="34" charset="-120"/>
               </a:rPr>
-              <a:t>06 / 08</a:t>
+              <a:t>06 / 13</a:t>
             </a:r>
             <a:endParaRPr lang="en-US" sz="1000" dirty="0"/>
           </a:p>
@@ -4796,7 +7499,7 @@
                 <a:ea typeface="Arial" pitchFamily="34" charset="-122"/>
                 <a:cs typeface="Arial" pitchFamily="34" charset="-120"/>
               </a:rPr>
-              <a:t>05 — MODÈLE &amp; PORTEUR</a:t>
+              <a:t>04 — RÉALISATION 01</a:t>
             </a:r>
             <a:endParaRPr lang="en-US" sz="1100" dirty="0"/>
           </a:p>
@@ -4810,24 +7513,24 @@
         </p:nvSpPr>
         <p:spPr>
           <a:xfrm>
-            <a:off x="640080" y="777240"/>
-            <a:ext cx="10972800" cy="457200"/>
-          </a:xfrm>
-          <a:prstGeom prst="rect">
-            <a:avLst/>
-          </a:prstGeom>
-          <a:noFill/>
-          <a:ln/>
-        </p:spPr>
-        <p:txBody>
-          <a:bodyPr wrap="square" rtlCol="0" anchor="ctr"/>
-          <a:lstStyle/>
-          <a:p>
-            <a:pPr indent="0" marL="0">
-              <a:buNone/>
-            </a:pPr>
-            <a:r>
-              <a:rPr lang="en-US" sz="3000" b="1" dirty="0">
+            <a:off x="640080" y="731520"/>
+            <a:ext cx="4754880" cy="457200"/>
+          </a:xfrm>
+          <a:prstGeom prst="rect">
+            <a:avLst/>
+          </a:prstGeom>
+          <a:noFill/>
+          <a:ln/>
+        </p:spPr>
+        <p:txBody>
+          <a:bodyPr wrap="square" rtlCol="0" anchor="ctr"/>
+          <a:lstStyle/>
+          <a:p>
+            <a:pPr indent="0" marL="0">
+              <a:buNone/>
+            </a:pPr>
+            <a:r>
+              <a:rPr lang="en-US" sz="2800" b="1" dirty="0">
                 <a:solidFill>
                   <a:srgbClr val="12151C"/>
                 </a:solidFill>
@@ -4835,31 +7538,50 @@
                 <a:ea typeface="Arial" pitchFamily="34" charset="-122"/>
                 <a:cs typeface="Arial" pitchFamily="34" charset="-120"/>
               </a:rPr>
-              <a:t>Fonctionnement &amp; responsabilité</a:t>
-            </a:r>
-            <a:endParaRPr lang="en-US" sz="3000" dirty="0"/>
-          </a:p>
-        </p:txBody>
-      </p:sp>
-      <p:sp>
-        <p:nvSpPr>
-          <p:cNvPr id="5" name="Shape 3"/>
-          <p:cNvSpPr/>
-          <p:nvPr/>
-        </p:nvSpPr>
-        <p:spPr>
-          <a:xfrm>
-            <a:off x="640080" y="1463040"/>
-            <a:ext cx="2697480" cy="73152"/>
-          </a:xfrm>
-          <a:prstGeom prst="rect">
-            <a:avLst/>
-          </a:prstGeom>
-          <a:solidFill>
-            <a:srgbClr val="E63312"/>
-          </a:solidFill>
-          <a:ln/>
-        </p:spPr>
+              <a:t>ODev Studio</a:t>
+            </a:r>
+            <a:endParaRPr lang="en-US" sz="2800" dirty="0"/>
+          </a:p>
+        </p:txBody>
+      </p:sp>
+      <p:sp>
+        <p:nvSpPr>
+          <p:cNvPr id="5" name="Text 3"/>
+          <p:cNvSpPr/>
+          <p:nvPr/>
+        </p:nvSpPr>
+        <p:spPr>
+          <a:xfrm>
+            <a:off x="640080" y="1188720"/>
+            <a:ext cx="4754880" cy="320040"/>
+          </a:xfrm>
+          <a:prstGeom prst="rect">
+            <a:avLst/>
+          </a:prstGeom>
+          <a:noFill/>
+          <a:ln/>
+        </p:spPr>
+        <p:txBody>
+          <a:bodyPr wrap="square" rtlCol="0" anchor="ctr"/>
+          <a:lstStyle/>
+          <a:p>
+            <a:pPr indent="0" marL="0">
+              <a:buNone/>
+            </a:pPr>
+            <a:r>
+              <a:rPr lang="en-US" sz="1300" b="1" dirty="0">
+                <a:solidFill>
+                  <a:srgbClr val="E63312"/>
+                </a:solidFill>
+                <a:latin typeface="Arial" pitchFamily="34" charset="0"/>
+                <a:ea typeface="Arial" pitchFamily="34" charset="-122"/>
+                <a:cs typeface="Arial" pitchFamily="34" charset="-120"/>
+              </a:rPr>
+              <a:t>Site vitrine studio</a:t>
+            </a:r>
+            <a:endParaRPr lang="en-US" sz="1300" dirty="0"/>
+          </a:p>
+        </p:txBody>
       </p:sp>
       <p:sp>
         <p:nvSpPr>
@@ -4869,32 +7591,80 @@
         </p:nvSpPr>
         <p:spPr>
           <a:xfrm>
-            <a:off x="640080" y="1691640"/>
-            <a:ext cx="2697480" cy="320040"/>
-          </a:xfrm>
-          <a:prstGeom prst="rect">
-            <a:avLst/>
-          </a:prstGeom>
-          <a:noFill/>
-          <a:ln/>
-        </p:spPr>
-        <p:txBody>
-          <a:bodyPr wrap="square" rtlCol="0" anchor="ctr"/>
-          <a:lstStyle/>
-          <a:p>
-            <a:pPr indent="0" marL="0">
-              <a:buNone/>
-            </a:pPr>
-            <a:r>
-              <a:rPr lang="en-US" sz="1400" b="1" dirty="0">
+            <a:off x="640080" y="1645920"/>
+            <a:ext cx="4754880" cy="1097280"/>
+          </a:xfrm>
+          <a:prstGeom prst="rect">
+            <a:avLst/>
+          </a:prstGeom>
+          <a:noFill/>
+          <a:ln/>
+        </p:spPr>
+        <p:txBody>
+          <a:bodyPr wrap="square" rtlCol="0" anchor="ctr"/>
+          <a:lstStyle/>
+          <a:p>
+            <a:pPr indent="0" marL="0">
+              <a:buNone/>
+            </a:pPr>
+            <a:r>
+              <a:rPr lang="en-US" sz="1400" dirty="0">
+                <a:solidFill>
+                  <a:srgbClr val="2A303C"/>
+                </a:solidFill>
+                <a:latin typeface="Arial" pitchFamily="34" charset="0"/>
+                <a:ea typeface="Arial" pitchFamily="34" charset="-122"/>
+                <a:cs typeface="Arial" pitchFamily="34" charset="-120"/>
+              </a:rPr>
+              <a:t>Présence web de la micro-entreprise : services, méthode, réalisations et contact.</a:t>
+            </a:r>
+            <a:endParaRPr lang="en-US" sz="1400" dirty="0"/>
+          </a:p>
+        </p:txBody>
+      </p:sp>
+      <p:sp>
+        <p:nvSpPr>
+          <p:cNvPr id="7" name="Text 5">
+            <a:hlinkClick r:id="rId1" tooltip=""/>
+          </p:cNvPr>
+          <p:cNvSpPr/>
+          <p:nvPr/>
+        </p:nvSpPr>
+        <p:spPr>
+          <a:xfrm>
+            <a:off x="640080" y="2926080"/>
+            <a:ext cx="4754880" cy="365760"/>
+          </a:xfrm>
+          <a:prstGeom prst="rect">
+            <a:avLst/>
+          </a:prstGeom>
+          <a:noFill/>
+          <a:ln/>
+        </p:spPr>
+        <p:txBody>
+          <a:bodyPr wrap="square" rtlCol="0" anchor="ctr"/>
+          <a:lstStyle/>
+          <a:p>
+            <a:pPr indent="0" marL="0">
+              <a:buNone/>
+            </a:pPr>
+            <a:r>
+              <a:rPr lang="en-US" sz="1400" b="1" u="sng" dirty="0">
                 <a:solidFill>
                   <a:srgbClr val="E63312"/>
                 </a:solidFill>
                 <a:latin typeface="Arial" pitchFamily="34" charset="0"/>
                 <a:ea typeface="Arial" pitchFamily="34" charset="-122"/>
                 <a:cs typeface="Arial" pitchFamily="34" charset="-120"/>
-              </a:rPr>
-              <a:t>01</a:t>
+                <a:hlinkClick r:id="rId1" invalidUrl="" action="" tgtFrame="" tooltip="" history="1" highlightClick="0" endSnd="0">
+                  <a:extLst>
+                    <a:ext uri="{A12FA001-AC4F-418D-AE19-62706E023703}">
+                      <ahyp:hlinkClr xmlns:ahyp="http://schemas.microsoft.com/office/drawing/2018/hyperlinkcolor" val="tx"/>
+                    </a:ext>
+                  </a:extLst>
+                </a:hlinkClick>
+              </a:rPr>
+              <a:t>Voir le site en ligne →</a:t>
             </a:r>
             <a:endParaRPr lang="en-US" sz="1400" dirty="0"/>
           </a:p>
@@ -4902,77 +7672,47 @@
       </p:sp>
       <p:sp>
         <p:nvSpPr>
-          <p:cNvPr id="7" name="Text 5"/>
-          <p:cNvSpPr/>
-          <p:nvPr/>
-        </p:nvSpPr>
-        <p:spPr>
-          <a:xfrm>
-            <a:off x="640080" y="2011680"/>
-            <a:ext cx="2697480" cy="320040"/>
-          </a:xfrm>
-          <a:prstGeom prst="rect">
-            <a:avLst/>
-          </a:prstGeom>
-          <a:noFill/>
-          <a:ln/>
-        </p:spPr>
-        <p:txBody>
-          <a:bodyPr wrap="square" rtlCol="0" anchor="ctr"/>
-          <a:lstStyle/>
-          <a:p>
-            <a:pPr indent="0" marL="0">
-              <a:buNone/>
-            </a:pPr>
-            <a:r>
-              <a:rPr lang="en-US" sz="1600" b="1" dirty="0">
-                <a:solidFill>
-                  <a:srgbClr val="12151C"/>
-                </a:solidFill>
-                <a:latin typeface="Arial" pitchFamily="34" charset="0"/>
-                <a:ea typeface="Arial" pitchFamily="34" charset="-122"/>
-                <a:cs typeface="Arial" pitchFamily="34" charset="-120"/>
-              </a:rPr>
-              <a:t>Brief</a:t>
-            </a:r>
-            <a:endParaRPr lang="en-US" sz="1600" dirty="0"/>
-          </a:p>
-        </p:txBody>
-      </p:sp>
-      <p:sp>
-        <p:nvSpPr>
-          <p:cNvPr id="8" name="Text 6"/>
-          <p:cNvSpPr/>
-          <p:nvPr/>
-        </p:nvSpPr>
-        <p:spPr>
-          <a:xfrm>
-            <a:off x="640080" y="2331720"/>
-            <a:ext cx="2697480" cy="320040"/>
-          </a:xfrm>
-          <a:prstGeom prst="rect">
-            <a:avLst/>
-          </a:prstGeom>
-          <a:noFill/>
-          <a:ln/>
-        </p:spPr>
-        <p:txBody>
-          <a:bodyPr wrap="square" rtlCol="0" anchor="ctr"/>
-          <a:lstStyle/>
-          <a:p>
-            <a:pPr indent="0" marL="0">
-              <a:buNone/>
-            </a:pPr>
-            <a:r>
-              <a:rPr lang="en-US" sz="1200" dirty="0">
+          <p:cNvPr id="8" name="Text 6">
+            <a:hlinkClick r:id="rId2" tooltip=""/>
+          </p:cNvPr>
+          <p:cNvSpPr/>
+          <p:nvPr/>
+        </p:nvSpPr>
+        <p:spPr>
+          <a:xfrm>
+            <a:off x="640080" y="3246120"/>
+            <a:ext cx="4754880" cy="320040"/>
+          </a:xfrm>
+          <a:prstGeom prst="rect">
+            <a:avLst/>
+          </a:prstGeom>
+          <a:noFill/>
+          <a:ln/>
+        </p:spPr>
+        <p:txBody>
+          <a:bodyPr wrap="square" rtlCol="0" anchor="ctr"/>
+          <a:lstStyle/>
+          <a:p>
+            <a:pPr indent="0" marL="0">
+              <a:buNone/>
+            </a:pPr>
+            <a:r>
+              <a:rPr lang="en-US" sz="1200" u="sng" dirty="0">
                 <a:solidFill>
                   <a:srgbClr val="2A303C"/>
                 </a:solidFill>
                 <a:latin typeface="Arial" pitchFamily="34" charset="0"/>
                 <a:ea typeface="Arial" pitchFamily="34" charset="-122"/>
                 <a:cs typeface="Arial" pitchFamily="34" charset="-120"/>
-              </a:rPr>
-              <a:t>Écoute, cadrage, devis</a:t>
+                <a:hlinkClick r:id="rId2" invalidUrl="" action="" tgtFrame="" tooltip="" history="1" highlightClick="0" endSnd="0">
+                  <a:extLst>
+                    <a:ext uri="{A12FA001-AC4F-418D-AE19-62706E023703}">
+                      <ahyp:hlinkClr xmlns:ahyp="http://schemas.microsoft.com/office/drawing/2018/hyperlinkcolor" val="tx"/>
+                    </a:ext>
+                  </a:extLst>
+                </a:hlinkClick>
+              </a:rPr>
+              <a:t>odev.kodyalabs.fr</a:t>
             </a:r>
             <a:endParaRPr lang="en-US" sz="1200" dirty="0"/>
           </a:p>
@@ -4980,425 +7720,62 @@
       </p:sp>
       <p:sp>
         <p:nvSpPr>
-          <p:cNvPr id="9" name="Shape 7"/>
-          <p:cNvSpPr/>
-          <p:nvPr/>
-        </p:nvSpPr>
-        <p:spPr>
-          <a:xfrm>
-            <a:off x="3474720" y="1463040"/>
-            <a:ext cx="2697480" cy="73152"/>
-          </a:xfrm>
-          <a:prstGeom prst="rect">
-            <a:avLst/>
-          </a:prstGeom>
-          <a:solidFill>
-            <a:srgbClr val="E63312"/>
-          </a:solidFill>
-          <a:ln/>
-        </p:spPr>
-      </p:sp>
-      <p:sp>
-        <p:nvSpPr>
-          <p:cNvPr id="10" name="Text 8"/>
-          <p:cNvSpPr/>
-          <p:nvPr/>
-        </p:nvSpPr>
-        <p:spPr>
-          <a:xfrm>
-            <a:off x="3474720" y="1691640"/>
-            <a:ext cx="2697480" cy="320040"/>
-          </a:xfrm>
-          <a:prstGeom prst="rect">
-            <a:avLst/>
-          </a:prstGeom>
-          <a:noFill/>
-          <a:ln/>
-        </p:spPr>
-        <p:txBody>
-          <a:bodyPr wrap="square" rtlCol="0" anchor="ctr"/>
-          <a:lstStyle/>
-          <a:p>
-            <a:pPr indent="0" marL="0">
-              <a:buNone/>
-            </a:pPr>
-            <a:r>
-              <a:rPr lang="en-US" sz="1400" b="1" dirty="0">
-                <a:solidFill>
-                  <a:srgbClr val="E63312"/>
-                </a:solidFill>
-                <a:latin typeface="Arial" pitchFamily="34" charset="0"/>
-                <a:ea typeface="Arial" pitchFamily="34" charset="-122"/>
-                <a:cs typeface="Arial" pitchFamily="34" charset="-120"/>
-              </a:rPr>
-              <a:t>02</a:t>
-            </a:r>
-            <a:endParaRPr lang="en-US" sz="1400" dirty="0"/>
-          </a:p>
-        </p:txBody>
-      </p:sp>
-      <p:sp>
-        <p:nvSpPr>
-          <p:cNvPr id="11" name="Text 9"/>
-          <p:cNvSpPr/>
-          <p:nvPr/>
-        </p:nvSpPr>
-        <p:spPr>
-          <a:xfrm>
-            <a:off x="3474720" y="2011680"/>
-            <a:ext cx="2697480" cy="320040"/>
-          </a:xfrm>
-          <a:prstGeom prst="rect">
-            <a:avLst/>
-          </a:prstGeom>
-          <a:noFill/>
-          <a:ln/>
-        </p:spPr>
-        <p:txBody>
-          <a:bodyPr wrap="square" rtlCol="0" anchor="ctr"/>
-          <a:lstStyle/>
-          <a:p>
-            <a:pPr indent="0" marL="0">
-              <a:buNone/>
-            </a:pPr>
-            <a:r>
-              <a:rPr lang="en-US" sz="1600" b="1" dirty="0">
-                <a:solidFill>
-                  <a:srgbClr val="12151C"/>
-                </a:solidFill>
-                <a:latin typeface="Arial" pitchFamily="34" charset="0"/>
-                <a:ea typeface="Arial" pitchFamily="34" charset="-122"/>
-                <a:cs typeface="Arial" pitchFamily="34" charset="-120"/>
-              </a:rPr>
-              <a:t>Conception</a:t>
-            </a:r>
-            <a:endParaRPr lang="en-US" sz="1600" dirty="0"/>
-          </a:p>
-        </p:txBody>
-      </p:sp>
-      <p:sp>
-        <p:nvSpPr>
-          <p:cNvPr id="12" name="Text 10"/>
-          <p:cNvSpPr/>
-          <p:nvPr/>
-        </p:nvSpPr>
-        <p:spPr>
-          <a:xfrm>
-            <a:off x="3474720" y="2331720"/>
-            <a:ext cx="2697480" cy="320040"/>
-          </a:xfrm>
-          <a:prstGeom prst="rect">
-            <a:avLst/>
-          </a:prstGeom>
-          <a:noFill/>
-          <a:ln/>
-        </p:spPr>
-        <p:txBody>
-          <a:bodyPr wrap="square" rtlCol="0" anchor="ctr"/>
-          <a:lstStyle/>
-          <a:p>
-            <a:pPr indent="0" marL="0">
-              <a:buNone/>
-            </a:pPr>
-            <a:r>
-              <a:rPr lang="en-US" sz="1200" dirty="0">
-                <a:solidFill>
-                  <a:srgbClr val="2A303C"/>
-                </a:solidFill>
-                <a:latin typeface="Arial" pitchFamily="34" charset="0"/>
-                <a:ea typeface="Arial" pitchFamily="34" charset="-122"/>
-                <a:cs typeface="Arial" pitchFamily="34" charset="-120"/>
-              </a:rPr>
-              <a:t>Architecture &amp; validation</a:t>
-            </a:r>
-            <a:endParaRPr lang="en-US" sz="1200" dirty="0"/>
-          </a:p>
-        </p:txBody>
-      </p:sp>
-      <p:sp>
-        <p:nvSpPr>
-          <p:cNvPr id="13" name="Shape 11"/>
-          <p:cNvSpPr/>
-          <p:nvPr/>
-        </p:nvSpPr>
-        <p:spPr>
-          <a:xfrm>
-            <a:off x="6309360" y="1463040"/>
-            <a:ext cx="2697480" cy="73152"/>
-          </a:xfrm>
-          <a:prstGeom prst="rect">
-            <a:avLst/>
-          </a:prstGeom>
-          <a:solidFill>
-            <a:srgbClr val="E63312"/>
-          </a:solidFill>
-          <a:ln/>
-        </p:spPr>
-      </p:sp>
-      <p:sp>
-        <p:nvSpPr>
-          <p:cNvPr id="14" name="Text 12"/>
-          <p:cNvSpPr/>
-          <p:nvPr/>
-        </p:nvSpPr>
-        <p:spPr>
-          <a:xfrm>
-            <a:off x="6309360" y="1691640"/>
-            <a:ext cx="2697480" cy="320040"/>
-          </a:xfrm>
-          <a:prstGeom prst="rect">
-            <a:avLst/>
-          </a:prstGeom>
-          <a:noFill/>
-          <a:ln/>
-        </p:spPr>
-        <p:txBody>
-          <a:bodyPr wrap="square" rtlCol="0" anchor="ctr"/>
-          <a:lstStyle/>
-          <a:p>
-            <a:pPr indent="0" marL="0">
-              <a:buNone/>
-            </a:pPr>
-            <a:r>
-              <a:rPr lang="en-US" sz="1400" b="1" dirty="0">
-                <a:solidFill>
-                  <a:srgbClr val="E63312"/>
-                </a:solidFill>
-                <a:latin typeface="Arial" pitchFamily="34" charset="0"/>
-                <a:ea typeface="Arial" pitchFamily="34" charset="-122"/>
-                <a:cs typeface="Arial" pitchFamily="34" charset="-120"/>
-              </a:rPr>
-              <a:t>03</a:t>
-            </a:r>
-            <a:endParaRPr lang="en-US" sz="1400" dirty="0"/>
-          </a:p>
-        </p:txBody>
-      </p:sp>
-      <p:sp>
-        <p:nvSpPr>
-          <p:cNvPr id="15" name="Text 13"/>
-          <p:cNvSpPr/>
-          <p:nvPr/>
-        </p:nvSpPr>
-        <p:spPr>
-          <a:xfrm>
-            <a:off x="6309360" y="2011680"/>
-            <a:ext cx="2697480" cy="320040"/>
-          </a:xfrm>
-          <a:prstGeom prst="rect">
-            <a:avLst/>
-          </a:prstGeom>
-          <a:noFill/>
-          <a:ln/>
-        </p:spPr>
-        <p:txBody>
-          <a:bodyPr wrap="square" rtlCol="0" anchor="ctr"/>
-          <a:lstStyle/>
-          <a:p>
-            <a:pPr indent="0" marL="0">
-              <a:buNone/>
-            </a:pPr>
-            <a:r>
-              <a:rPr lang="en-US" sz="1600" b="1" dirty="0">
-                <a:solidFill>
-                  <a:srgbClr val="12151C"/>
-                </a:solidFill>
-                <a:latin typeface="Arial" pitchFamily="34" charset="0"/>
-                <a:ea typeface="Arial" pitchFamily="34" charset="-122"/>
-                <a:cs typeface="Arial" pitchFamily="34" charset="-120"/>
-              </a:rPr>
-              <a:t>Développement</a:t>
-            </a:r>
-            <a:endParaRPr lang="en-US" sz="1600" dirty="0"/>
-          </a:p>
-        </p:txBody>
-      </p:sp>
-      <p:sp>
-        <p:nvSpPr>
-          <p:cNvPr id="16" name="Text 14"/>
-          <p:cNvSpPr/>
-          <p:nvPr/>
-        </p:nvSpPr>
-        <p:spPr>
-          <a:xfrm>
-            <a:off x="6309360" y="2331720"/>
-            <a:ext cx="2697480" cy="320040"/>
-          </a:xfrm>
-          <a:prstGeom prst="rect">
-            <a:avLst/>
-          </a:prstGeom>
-          <a:noFill/>
-          <a:ln/>
-        </p:spPr>
-        <p:txBody>
-          <a:bodyPr wrap="square" rtlCol="0" anchor="ctr"/>
-          <a:lstStyle/>
-          <a:p>
-            <a:pPr indent="0" marL="0">
-              <a:buNone/>
-            </a:pPr>
-            <a:r>
-              <a:rPr lang="en-US" sz="1200" dirty="0">
-                <a:solidFill>
-                  <a:srgbClr val="2A303C"/>
-                </a:solidFill>
-                <a:latin typeface="Arial" pitchFamily="34" charset="0"/>
-                <a:ea typeface="Arial" pitchFamily="34" charset="-122"/>
-                <a:cs typeface="Arial" pitchFamily="34" charset="-120"/>
-              </a:rPr>
-              <a:t>Production itérative</a:t>
-            </a:r>
-            <a:endParaRPr lang="en-US" sz="1200" dirty="0"/>
-          </a:p>
-        </p:txBody>
-      </p:sp>
-      <p:sp>
-        <p:nvSpPr>
-          <p:cNvPr id="17" name="Shape 15"/>
-          <p:cNvSpPr/>
-          <p:nvPr/>
-        </p:nvSpPr>
-        <p:spPr>
-          <a:xfrm>
-            <a:off x="9144000" y="1463040"/>
-            <a:ext cx="2697480" cy="73152"/>
-          </a:xfrm>
-          <a:prstGeom prst="rect">
-            <a:avLst/>
-          </a:prstGeom>
-          <a:solidFill>
-            <a:srgbClr val="E63312"/>
-          </a:solidFill>
-          <a:ln/>
-        </p:spPr>
-      </p:sp>
-      <p:sp>
-        <p:nvSpPr>
-          <p:cNvPr id="18" name="Text 16"/>
-          <p:cNvSpPr/>
-          <p:nvPr/>
-        </p:nvSpPr>
-        <p:spPr>
-          <a:xfrm>
-            <a:off x="9144000" y="1691640"/>
-            <a:ext cx="2697480" cy="320040"/>
-          </a:xfrm>
-          <a:prstGeom prst="rect">
-            <a:avLst/>
-          </a:prstGeom>
-          <a:noFill/>
-          <a:ln/>
-        </p:spPr>
-        <p:txBody>
-          <a:bodyPr wrap="square" rtlCol="0" anchor="ctr"/>
-          <a:lstStyle/>
-          <a:p>
-            <a:pPr indent="0" marL="0">
-              <a:buNone/>
-            </a:pPr>
-            <a:r>
-              <a:rPr lang="en-US" sz="1400" b="1" dirty="0">
-                <a:solidFill>
-                  <a:srgbClr val="E63312"/>
-                </a:solidFill>
-                <a:latin typeface="Arial" pitchFamily="34" charset="0"/>
-                <a:ea typeface="Arial" pitchFamily="34" charset="-122"/>
-                <a:cs typeface="Arial" pitchFamily="34" charset="-120"/>
-              </a:rPr>
-              <a:t>04</a:t>
-            </a:r>
-            <a:endParaRPr lang="en-US" sz="1400" dirty="0"/>
-          </a:p>
-        </p:txBody>
-      </p:sp>
-      <p:sp>
-        <p:nvSpPr>
-          <p:cNvPr id="19" name="Text 17"/>
-          <p:cNvSpPr/>
-          <p:nvPr/>
-        </p:nvSpPr>
-        <p:spPr>
-          <a:xfrm>
-            <a:off x="9144000" y="2011680"/>
-            <a:ext cx="2697480" cy="320040"/>
-          </a:xfrm>
-          <a:prstGeom prst="rect">
-            <a:avLst/>
-          </a:prstGeom>
-          <a:noFill/>
-          <a:ln/>
-        </p:spPr>
-        <p:txBody>
-          <a:bodyPr wrap="square" rtlCol="0" anchor="ctr"/>
-          <a:lstStyle/>
-          <a:p>
-            <a:pPr indent="0" marL="0">
-              <a:buNone/>
-            </a:pPr>
-            <a:r>
-              <a:rPr lang="en-US" sz="1600" b="1" dirty="0">
-                <a:solidFill>
-                  <a:srgbClr val="12151C"/>
-                </a:solidFill>
-                <a:latin typeface="Arial" pitchFamily="34" charset="0"/>
-                <a:ea typeface="Arial" pitchFamily="34" charset="-122"/>
-                <a:cs typeface="Arial" pitchFamily="34" charset="-120"/>
-              </a:rPr>
-              <a:t>Livraison</a:t>
-            </a:r>
-            <a:endParaRPr lang="en-US" sz="1600" dirty="0"/>
-          </a:p>
-        </p:txBody>
-      </p:sp>
-      <p:sp>
-        <p:nvSpPr>
-          <p:cNvPr id="20" name="Text 18"/>
-          <p:cNvSpPr/>
-          <p:nvPr/>
-        </p:nvSpPr>
-        <p:spPr>
-          <a:xfrm>
-            <a:off x="9144000" y="2331720"/>
-            <a:ext cx="2697480" cy="320040"/>
-          </a:xfrm>
-          <a:prstGeom prst="rect">
-            <a:avLst/>
-          </a:prstGeom>
-          <a:noFill/>
-          <a:ln/>
-        </p:spPr>
-        <p:txBody>
-          <a:bodyPr wrap="square" rtlCol="0" anchor="ctr"/>
-          <a:lstStyle/>
-          <a:p>
-            <a:pPr indent="0" marL="0">
-              <a:buNone/>
-            </a:pPr>
-            <a:r>
-              <a:rPr lang="en-US" sz="1200" dirty="0">
-                <a:solidFill>
-                  <a:srgbClr val="2A303C"/>
-                </a:solidFill>
-                <a:latin typeface="Arial" pitchFamily="34" charset="0"/>
-                <a:ea typeface="Arial" pitchFamily="34" charset="-122"/>
-                <a:cs typeface="Arial" pitchFamily="34" charset="-120"/>
-              </a:rPr>
-              <a:t>Mise en ligne &amp; suivi</a:t>
-            </a:r>
-            <a:endParaRPr lang="en-US" sz="1200" dirty="0"/>
-          </a:p>
-        </p:txBody>
-      </p:sp>
-      <p:sp>
-        <p:nvSpPr>
-          <p:cNvPr id="21" name="Shape 19"/>
-          <p:cNvSpPr/>
-          <p:nvPr/>
-        </p:nvSpPr>
-        <p:spPr>
-          <a:xfrm>
-            <a:off x="640080" y="3108960"/>
-            <a:ext cx="10972800" cy="2560320"/>
+          <p:cNvPr id="9" name="Text 7">
+            <a:hlinkClick r:id="rId3" tooltip=""/>
+          </p:cNvPr>
+          <p:cNvSpPr/>
+          <p:nvPr/>
+        </p:nvSpPr>
+        <p:spPr>
+          <a:xfrm>
+            <a:off x="640080" y="5303520"/>
+            <a:ext cx="4754880" cy="320040"/>
+          </a:xfrm>
+          <a:prstGeom prst="rect">
+            <a:avLst/>
+          </a:prstGeom>
+          <a:noFill/>
+          <a:ln/>
+        </p:spPr>
+        <p:txBody>
+          <a:bodyPr wrap="square" rtlCol="0" anchor="ctr"/>
+          <a:lstStyle/>
+          <a:p>
+            <a:pPr indent="0" marL="0">
+              <a:buNone/>
+            </a:pPr>
+            <a:r>
+              <a:rPr lang="en-US" sz="1100" u="sng" dirty="0">
+                <a:solidFill>
+                  <a:srgbClr val="1A7A72"/>
+                </a:solidFill>
+                <a:latin typeface="Arial" pitchFamily="34" charset="0"/>
+                <a:ea typeface="Arial" pitchFamily="34" charset="-122"/>
+                <a:cs typeface="Arial" pitchFamily="34" charset="-120"/>
+                <a:hlinkClick r:id="rId3" invalidUrl="" action="" tgtFrame="" tooltip="" history="1" highlightClick="0" endSnd="0">
+                  <a:extLst>
+                    <a:ext uri="{A12FA001-AC4F-418D-AE19-62706E023703}">
+                      <ahyp:hlinkClr xmlns:ahyp="http://schemas.microsoft.com/office/drawing/2018/hyperlinkcolor" val="tx"/>
+                    </a:ext>
+                  </a:extLst>
+                </a:hlinkClick>
+              </a:rPr>
+              <a:t>https://odev.kodyalabs.fr/</a:t>
+            </a:r>
+            <a:endParaRPr lang="en-US" sz="1100" dirty="0"/>
+          </a:p>
+        </p:txBody>
+      </p:sp>
+      <p:sp>
+        <p:nvSpPr>
+          <p:cNvPr id="10" name="Shape 8"/>
+          <p:cNvSpPr/>
+          <p:nvPr/>
+        </p:nvSpPr>
+        <p:spPr>
+          <a:xfrm>
+            <a:off x="5669280" y="640080"/>
+            <a:ext cx="5943600" cy="5120640"/>
           </a:xfrm>
           <a:prstGeom prst="rect">
             <a:avLst/>
@@ -5406,124 +7783,41 @@
           <a:solidFill>
             <a:srgbClr val="E9ECF1"/>
           </a:solidFill>
-          <a:ln/>
-        </p:spPr>
-      </p:sp>
-      <p:sp>
-        <p:nvSpPr>
-          <p:cNvPr id="22" name="Text 20"/>
-          <p:cNvSpPr/>
-          <p:nvPr/>
-        </p:nvSpPr>
-        <p:spPr>
-          <a:xfrm>
-            <a:off x="914400" y="3383280"/>
-            <a:ext cx="10058400" cy="365760"/>
-          </a:xfrm>
-          <a:prstGeom prst="rect">
-            <a:avLst/>
-          </a:prstGeom>
-          <a:noFill/>
-          <a:ln/>
-        </p:spPr>
-        <p:txBody>
-          <a:bodyPr wrap="square" rtlCol="0" anchor="ctr"/>
-          <a:lstStyle/>
-          <a:p>
-            <a:pPr indent="0" marL="0">
-              <a:buNone/>
-            </a:pPr>
-            <a:r>
-              <a:rPr lang="en-US" sz="2000" b="1" dirty="0">
-                <a:solidFill>
-                  <a:srgbClr val="12151C"/>
-                </a:solidFill>
-                <a:latin typeface="Arial" pitchFamily="34" charset="0"/>
-                <a:ea typeface="Arial" pitchFamily="34" charset="-122"/>
-                <a:cs typeface="Arial" pitchFamily="34" charset="-120"/>
-              </a:rPr>
-              <a:t>Darren O'Sullivan — Fondateur</a:t>
-            </a:r>
-            <a:endParaRPr lang="en-US" sz="2000" dirty="0"/>
-          </a:p>
-        </p:txBody>
-      </p:sp>
-      <p:sp>
-        <p:nvSpPr>
-          <p:cNvPr id="23" name="Text 21"/>
-          <p:cNvSpPr/>
-          <p:nvPr/>
-        </p:nvSpPr>
-        <p:spPr>
-          <a:xfrm>
-            <a:off x="914400" y="3886200"/>
-            <a:ext cx="10058400" cy="1463040"/>
-          </a:xfrm>
-          <a:prstGeom prst="rect">
-            <a:avLst/>
-          </a:prstGeom>
-          <a:noFill/>
-          <a:ln/>
-        </p:spPr>
-        <p:txBody>
-          <a:bodyPr wrap="square" rtlCol="0" anchor="ctr"/>
-          <a:lstStyle/>
-          <a:p>
-            <a:pPr indent="0" marL="0">
-              <a:buNone/>
-            </a:pPr>
-            <a:r>
-              <a:rPr lang="en-US" sz="1400" dirty="0">
-                <a:solidFill>
-                  <a:srgbClr val="2A303C"/>
-                </a:solidFill>
-                <a:latin typeface="Arial" pitchFamily="34" charset="0"/>
-                <a:ea typeface="Arial" pitchFamily="34" charset="-122"/>
-                <a:cs typeface="Arial" pitchFamily="34" charset="-120"/>
-              </a:rPr>
-              <a:t>Développeur web orienté produit : interfaces, architectures React / Node.js, livraison d'outils utiles aux entreprises.</a:t>
-            </a:r>
-            <a:endParaRPr lang="en-US" sz="1400" dirty="0"/>
-          </a:p>
-          <a:p>
-            <a:pPr indent="0" marL="0">
-              <a:buNone/>
-            </a:pPr>
-            <a:r>
-              <a:rPr lang="en-US" sz="1400" dirty="0">
-                <a:solidFill>
-                  <a:srgbClr val="2A303C"/>
-                </a:solidFill>
-                <a:latin typeface="Arial" pitchFamily="34" charset="0"/>
-                <a:ea typeface="Arial" pitchFamily="34" charset="-122"/>
-                <a:cs typeface="Arial" pitchFamily="34" charset="-120"/>
-              </a:rPr>
-              <a:t>Compétences : React, Node.js, sites vitrine, UX/UI, bases de données.</a:t>
-            </a:r>
-            <a:endParaRPr lang="en-US" sz="1400" dirty="0"/>
-          </a:p>
-          <a:p>
-            <a:pPr indent="0" marL="0">
-              <a:buNone/>
-            </a:pPr>
-            <a:r>
-              <a:rPr lang="en-US" sz="1400" dirty="0">
-                <a:solidFill>
-                  <a:srgbClr val="2A303C"/>
-                </a:solidFill>
-                <a:latin typeface="Arial" pitchFamily="34" charset="0"/>
-                <a:ea typeface="Arial" pitchFamily="34" charset="-122"/>
-                <a:cs typeface="Arial" pitchFamily="34" charset="-120"/>
-              </a:rPr>
-              <a:t>Posture : micro-entreprise agile, responsabilité totale sur les livrables.</a:t>
-            </a:r>
-            <a:endParaRPr lang="en-US" sz="1400" dirty="0"/>
-          </a:p>
-        </p:txBody>
-      </p:sp>
-      <p:sp>
-        <p:nvSpPr>
-          <p:cNvPr id="24" name="Text 22"/>
+          <a:ln w="12700">
+            <a:solidFill>
+              <a:srgbClr val="C8CED8"/>
+            </a:solidFill>
+            <a:prstDash val="solid"/>
+          </a:ln>
+        </p:spPr>
+      </p:sp>
+      <p:pic>
+        <p:nvPicPr>
+          <p:cNvPr id="11" name="Image 0" descr="C:\Users\samyd\Desktop\GTA RP\ODev\dossier-creation\assets\img\odev.png">    </p:cNvPr>
+          <p:cNvPicPr>
+            <a:picLocks noChangeAspect="1"/>
+          </p:cNvPicPr>
+          <p:nvPr/>
+        </p:nvPicPr>
+        <p:blipFill>
+          <a:blip r:embed="rId4"/>
+          <a:stretch>
+            <a:fillRect/>
+          </a:stretch>
+        </p:blipFill>
+        <p:spPr>
+          <a:xfrm>
+            <a:off x="5806440" y="777240"/>
+            <a:ext cx="5669280" cy="4846320"/>
+          </a:xfrm>
+          <a:prstGeom prst="rect">
+            <a:avLst/>
+          </a:prstGeom>
+        </p:spPr>
+      </p:pic>
+      <p:sp>
+        <p:nvSpPr>
+          <p:cNvPr id="12" name="Text 9"/>
           <p:cNvSpPr/>
           <p:nvPr/>
         </p:nvSpPr>
@@ -5562,7 +7856,7 @@
       </p:sp>
       <p:sp>
         <p:nvSpPr>
-          <p:cNvPr id="25" name="Text 23"/>
+          <p:cNvPr id="13" name="Text 10"/>
           <p:cNvSpPr/>
           <p:nvPr/>
         </p:nvSpPr>
@@ -5593,7 +7887,7 @@
                 <a:ea typeface="Arial" pitchFamily="34" charset="-122"/>
                 <a:cs typeface="Arial" pitchFamily="34" charset="-120"/>
               </a:rPr>
-              <a:t>07 / 08</a:t>
+              <a:t>07 / 12</a:t>
             </a:r>
             <a:endParaRPr lang="en-US" sz="1000" dirty="0"/>
           </a:p>
@@ -5639,34 +7933,14 @@
             <a:avLst/>
           </a:prstGeom>
           <a:solidFill>
-            <a:srgbClr val="E9ECF1"/>
+            <a:srgbClr val="FFFFFF"/>
           </a:solidFill>
           <a:ln/>
         </p:spPr>
       </p:sp>
       <p:sp>
         <p:nvSpPr>
-          <p:cNvPr id="3" name="Shape 1"/>
-          <p:cNvSpPr/>
-          <p:nvPr/>
-        </p:nvSpPr>
-        <p:spPr>
-          <a:xfrm>
-            <a:off x="0" y="0"/>
-            <a:ext cx="12191695" cy="109728"/>
-          </a:xfrm>
-          <a:prstGeom prst="rect">
-            <a:avLst/>
-          </a:prstGeom>
-          <a:solidFill>
-            <a:srgbClr val="E63312"/>
-          </a:solidFill>
-          <a:ln/>
-        </p:spPr>
-      </p:sp>
-      <p:sp>
-        <p:nvSpPr>
-          <p:cNvPr id="4" name="Text 2"/>
+          <p:cNvPr id="3" name="Text 1"/>
           <p:cNvSpPr/>
           <p:nvPr/>
         </p:nvSpPr>
@@ -5697,7 +7971,7 @@
                 <a:ea typeface="Arial" pitchFamily="34" charset="-122"/>
                 <a:cs typeface="Arial" pitchFamily="34" charset="-120"/>
               </a:rPr>
-              <a:t>07 — DEMANDE</a:t>
+              <a:t>04 — RÉALISATION 02</a:t>
             </a:r>
             <a:endParaRPr lang="en-US" sz="1100" dirty="0"/>
           </a:p>
@@ -5705,40 +7979,79 @@
       </p:sp>
       <p:sp>
         <p:nvSpPr>
+          <p:cNvPr id="4" name="Text 2"/>
+          <p:cNvSpPr/>
+          <p:nvPr/>
+        </p:nvSpPr>
+        <p:spPr>
+          <a:xfrm>
+            <a:off x="640080" y="731520"/>
+            <a:ext cx="4754880" cy="457200"/>
+          </a:xfrm>
+          <a:prstGeom prst="rect">
+            <a:avLst/>
+          </a:prstGeom>
+          <a:noFill/>
+          <a:ln/>
+        </p:spPr>
+        <p:txBody>
+          <a:bodyPr wrap="square" rtlCol="0" anchor="ctr"/>
+          <a:lstStyle/>
+          <a:p>
+            <a:pPr indent="0" marL="0">
+              <a:buNone/>
+            </a:pPr>
+            <a:r>
+              <a:rPr lang="en-US" sz="2800" b="1" dirty="0">
+                <a:solidFill>
+                  <a:srgbClr val="12151C"/>
+                </a:solidFill>
+                <a:latin typeface="Arial" pitchFamily="34" charset="0"/>
+                <a:ea typeface="Arial" pitchFamily="34" charset="-122"/>
+                <a:cs typeface="Arial" pitchFamily="34" charset="-120"/>
+              </a:rPr>
+              <a:t>Dynasty8</a:t>
+            </a:r>
+            <a:endParaRPr lang="en-US" sz="2800" dirty="0"/>
+          </a:p>
+        </p:txBody>
+      </p:sp>
+      <p:sp>
+        <p:nvSpPr>
           <p:cNvPr id="5" name="Text 3"/>
           <p:cNvSpPr/>
           <p:nvPr/>
         </p:nvSpPr>
         <p:spPr>
           <a:xfrm>
-            <a:off x="640080" y="822960"/>
-            <a:ext cx="10972800" cy="502920"/>
-          </a:xfrm>
-          <a:prstGeom prst="rect">
-            <a:avLst/>
-          </a:prstGeom>
-          <a:noFill/>
-          <a:ln/>
-        </p:spPr>
-        <p:txBody>
-          <a:bodyPr wrap="square" rtlCol="0" anchor="ctr"/>
-          <a:lstStyle/>
-          <a:p>
-            <a:pPr indent="0" marL="0">
-              <a:buNone/>
-            </a:pPr>
-            <a:r>
-              <a:rPr lang="en-US" sz="3400" b="1" dirty="0">
-                <a:solidFill>
-                  <a:srgbClr val="12151C"/>
-                </a:solidFill>
-                <a:latin typeface="Arial" pitchFamily="34" charset="0"/>
-                <a:ea typeface="Arial" pitchFamily="34" charset="-122"/>
-                <a:cs typeface="Arial" pitchFamily="34" charset="-120"/>
-              </a:rPr>
-              <a:t>Demande d'ouverture</a:t>
-            </a:r>
-            <a:endParaRPr lang="en-US" sz="3400" dirty="0"/>
+            <a:off x="640080" y="1188720"/>
+            <a:ext cx="4754880" cy="320040"/>
+          </a:xfrm>
+          <a:prstGeom prst="rect">
+            <a:avLst/>
+          </a:prstGeom>
+          <a:noFill/>
+          <a:ln/>
+        </p:spPr>
+        <p:txBody>
+          <a:bodyPr wrap="square" rtlCol="0" anchor="ctr"/>
+          <a:lstStyle/>
+          <a:p>
+            <a:pPr indent="0" marL="0">
+              <a:buNone/>
+            </a:pPr>
+            <a:r>
+              <a:rPr lang="en-US" sz="1300" b="1" dirty="0">
+                <a:solidFill>
+                  <a:srgbClr val="1FA87A"/>
+                </a:solidFill>
+                <a:latin typeface="Arial" pitchFamily="34" charset="0"/>
+                <a:ea typeface="Arial" pitchFamily="34" charset="-122"/>
+                <a:cs typeface="Arial" pitchFamily="34" charset="-120"/>
+              </a:rPr>
+              <a:t>Plateforme immobilière</a:t>
+            </a:r>
+            <a:endParaRPr lang="en-US" sz="1300" dirty="0"/>
           </a:p>
         </p:txBody>
       </p:sp>
@@ -5750,24 +8063,24 @@
         </p:nvSpPr>
         <p:spPr>
           <a:xfrm>
-            <a:off x="640080" y="1508760"/>
-            <a:ext cx="10789920" cy="1188720"/>
-          </a:xfrm>
-          <a:prstGeom prst="rect">
-            <a:avLst/>
-          </a:prstGeom>
-          <a:noFill/>
-          <a:ln/>
-        </p:spPr>
-        <p:txBody>
-          <a:bodyPr wrap="square" rtlCol="0" anchor="ctr"/>
-          <a:lstStyle/>
-          <a:p>
-            <a:pPr indent="0" marL="0">
-              <a:buNone/>
-            </a:pPr>
-            <a:r>
-              <a:rPr lang="en-US" sz="1600" dirty="0">
+            <a:off x="640080" y="1645920"/>
+            <a:ext cx="4754880" cy="1097280"/>
+          </a:xfrm>
+          <a:prstGeom prst="rect">
+            <a:avLst/>
+          </a:prstGeom>
+          <a:noFill/>
+          <a:ln/>
+        </p:spPr>
+        <p:txBody>
+          <a:bodyPr wrap="square" rtlCol="0" anchor="ctr"/>
+          <a:lstStyle/>
+          <a:p>
+            <a:pPr indent="0" marL="0">
+              <a:buNone/>
+            </a:pPr>
+            <a:r>
+              <a:rPr lang="en-US" sz="1400" dirty="0">
                 <a:solidFill>
                   <a:srgbClr val="2A303C"/>
                 </a:solidFill>
@@ -5775,28 +8088,172 @@
                 <a:ea typeface="Arial" pitchFamily="34" charset="-122"/>
                 <a:cs typeface="Arial" pitchFamily="34" charset="-120"/>
               </a:rPr>
-              <a:t>Par le présent dossier, Darren O'Sullivan sollicite l'enregistrement et la reconnaissance de l'activité ODev en tant que micro-entreprise de services numériques, afin d'exercer légalement les prestations décrites au profit des entreprises et organisations du territoire.</a:t>
-            </a:r>
-            <a:endParaRPr lang="en-US" sz="1600" dirty="0"/>
-          </a:p>
-        </p:txBody>
-      </p:sp>
-      <p:sp>
-        <p:nvSpPr>
-          <p:cNvPr id="7" name="Shape 5"/>
+              <a:t>Catalogue de biens de prestige, recherche, zones et parcours agence.</a:t>
+            </a:r>
+            <a:endParaRPr lang="en-US" sz="1400" dirty="0"/>
+          </a:p>
+        </p:txBody>
+      </p:sp>
+      <p:sp>
+        <p:nvSpPr>
+          <p:cNvPr id="7" name="Text 5">
+            <a:hlinkClick r:id="rId1" tooltip=""/>
+          </p:cNvPr>
           <p:cNvSpPr/>
           <p:nvPr/>
         </p:nvSpPr>
         <p:spPr>
           <a:xfrm>
             <a:off x="640080" y="2926080"/>
-            <a:ext cx="10881360" cy="2377440"/>
+            <a:ext cx="4754880" cy="365760"/>
+          </a:xfrm>
+          <a:prstGeom prst="rect">
+            <a:avLst/>
+          </a:prstGeom>
+          <a:noFill/>
+          <a:ln/>
+        </p:spPr>
+        <p:txBody>
+          <a:bodyPr wrap="square" rtlCol="0" anchor="ctr"/>
+          <a:lstStyle/>
+          <a:p>
+            <a:pPr indent="0" marL="0">
+              <a:buNone/>
+            </a:pPr>
+            <a:r>
+              <a:rPr lang="en-US" sz="1400" b="1" u="sng" dirty="0">
+                <a:solidFill>
+                  <a:srgbClr val="E63312"/>
+                </a:solidFill>
+                <a:latin typeface="Arial" pitchFamily="34" charset="0"/>
+                <a:ea typeface="Arial" pitchFamily="34" charset="-122"/>
+                <a:cs typeface="Arial" pitchFamily="34" charset="-120"/>
+                <a:hlinkClick r:id="rId1" invalidUrl="" action="" tgtFrame="" tooltip="" history="1" highlightClick="0" endSnd="0">
+                  <a:extLst>
+                    <a:ext uri="{A12FA001-AC4F-418D-AE19-62706E023703}">
+                      <ahyp:hlinkClr xmlns:ahyp="http://schemas.microsoft.com/office/drawing/2018/hyperlinkcolor" val="tx"/>
+                    </a:ext>
+                  </a:extLst>
+                </a:hlinkClick>
+              </a:rPr>
+              <a:t>Voir le site en ligne →</a:t>
+            </a:r>
+            <a:endParaRPr lang="en-US" sz="1400" dirty="0"/>
+          </a:p>
+        </p:txBody>
+      </p:sp>
+      <p:sp>
+        <p:nvSpPr>
+          <p:cNvPr id="8" name="Text 6">
+            <a:hlinkClick r:id="rId2" tooltip=""/>
+          </p:cNvPr>
+          <p:cNvSpPr/>
+          <p:nvPr/>
+        </p:nvSpPr>
+        <p:spPr>
+          <a:xfrm>
+            <a:off x="640080" y="3246120"/>
+            <a:ext cx="4754880" cy="320040"/>
+          </a:xfrm>
+          <a:prstGeom prst="rect">
+            <a:avLst/>
+          </a:prstGeom>
+          <a:noFill/>
+          <a:ln/>
+        </p:spPr>
+        <p:txBody>
+          <a:bodyPr wrap="square" rtlCol="0" anchor="ctr"/>
+          <a:lstStyle/>
+          <a:p>
+            <a:pPr indent="0" marL="0">
+              <a:buNone/>
+            </a:pPr>
+            <a:r>
+              <a:rPr lang="en-US" sz="1200" u="sng" dirty="0">
+                <a:solidFill>
+                  <a:srgbClr val="2A303C"/>
+                </a:solidFill>
+                <a:latin typeface="Arial" pitchFamily="34" charset="0"/>
+                <a:ea typeface="Arial" pitchFamily="34" charset="-122"/>
+                <a:cs typeface="Arial" pitchFamily="34" charset="-120"/>
+                <a:hlinkClick r:id="rId2" invalidUrl="" action="" tgtFrame="" tooltip="" history="1" highlightClick="0" endSnd="0">
+                  <a:extLst>
+                    <a:ext uri="{A12FA001-AC4F-418D-AE19-62706E023703}">
+                      <ahyp:hlinkClr xmlns:ahyp="http://schemas.microsoft.com/office/drawing/2018/hyperlinkcolor" val="tx"/>
+                    </a:ext>
+                  </a:extLst>
+                </a:hlinkClick>
+              </a:rPr>
+              <a:t>dynasty8.kodyalabs.fr</a:t>
+            </a:r>
+            <a:endParaRPr lang="en-US" sz="1200" dirty="0"/>
+          </a:p>
+        </p:txBody>
+      </p:sp>
+      <p:sp>
+        <p:nvSpPr>
+          <p:cNvPr id="9" name="Text 7">
+            <a:hlinkClick r:id="rId3" tooltip=""/>
+          </p:cNvPr>
+          <p:cNvSpPr/>
+          <p:nvPr/>
+        </p:nvSpPr>
+        <p:spPr>
+          <a:xfrm>
+            <a:off x="640080" y="5303520"/>
+            <a:ext cx="4754880" cy="320040"/>
+          </a:xfrm>
+          <a:prstGeom prst="rect">
+            <a:avLst/>
+          </a:prstGeom>
+          <a:noFill/>
+          <a:ln/>
+        </p:spPr>
+        <p:txBody>
+          <a:bodyPr wrap="square" rtlCol="0" anchor="ctr"/>
+          <a:lstStyle/>
+          <a:p>
+            <a:pPr indent="0" marL="0">
+              <a:buNone/>
+            </a:pPr>
+            <a:r>
+              <a:rPr lang="en-US" sz="1100" u="sng" dirty="0">
+                <a:solidFill>
+                  <a:srgbClr val="1A7A72"/>
+                </a:solidFill>
+                <a:latin typeface="Arial" pitchFamily="34" charset="0"/>
+                <a:ea typeface="Arial" pitchFamily="34" charset="-122"/>
+                <a:cs typeface="Arial" pitchFamily="34" charset="-120"/>
+                <a:hlinkClick r:id="rId3" invalidUrl="" action="" tgtFrame="" tooltip="" history="1" highlightClick="0" endSnd="0">
+                  <a:extLst>
+                    <a:ext uri="{A12FA001-AC4F-418D-AE19-62706E023703}">
+                      <ahyp:hlinkClr xmlns:ahyp="http://schemas.microsoft.com/office/drawing/2018/hyperlinkcolor" val="tx"/>
+                    </a:ext>
+                  </a:extLst>
+                </a:hlinkClick>
+              </a:rPr>
+              <a:t>https://dynasty8.kodyalabs.fr/</a:t>
+            </a:r>
+            <a:endParaRPr lang="en-US" sz="1100" dirty="0"/>
+          </a:p>
+        </p:txBody>
+      </p:sp>
+      <p:sp>
+        <p:nvSpPr>
+          <p:cNvPr id="10" name="Shape 8"/>
+          <p:cNvSpPr/>
+          <p:nvPr/>
+        </p:nvSpPr>
+        <p:spPr>
+          <a:xfrm>
+            <a:off x="5669280" y="640080"/>
+            <a:ext cx="5943600" cy="5120640"/>
           </a:xfrm>
           <a:prstGeom prst="rect">
             <a:avLst/>
           </a:prstGeom>
           <a:solidFill>
-            <a:srgbClr val="FFFFFF"/>
+            <a:srgbClr val="E9ECF1"/>
           </a:solidFill>
           <a:ln w="12700">
             <a:solidFill>
@@ -5806,126 +8263,33 @@
           </a:ln>
         </p:spPr>
       </p:sp>
-      <p:sp>
-        <p:nvSpPr>
-          <p:cNvPr id="8" name="Text 6"/>
-          <p:cNvSpPr/>
-          <p:nvPr/>
-        </p:nvSpPr>
-        <p:spPr>
-          <a:xfrm>
-            <a:off x="1005840" y="3200400"/>
-            <a:ext cx="10058400" cy="822960"/>
-          </a:xfrm>
-          <a:prstGeom prst="rect">
-            <a:avLst/>
-          </a:prstGeom>
-          <a:noFill/>
-          <a:ln/>
-        </p:spPr>
-        <p:txBody>
-          <a:bodyPr wrap="square" rtlCol="0" anchor="ctr"/>
-          <a:lstStyle/>
-          <a:p>
-            <a:pPr indent="0" marL="0">
-              <a:buNone/>
-            </a:pPr>
-            <a:r>
-              <a:rPr lang="en-US" sz="1500" dirty="0">
-                <a:solidFill>
-                  <a:srgbClr val="2A303C"/>
-                </a:solidFill>
-                <a:latin typeface="Arial" pitchFamily="34" charset="0"/>
-                <a:ea typeface="Arial" pitchFamily="34" charset="-122"/>
-                <a:cs typeface="Arial" pitchFamily="34" charset="-120"/>
-              </a:rPr>
-              <a:t>ODev s'engage à exercer dans le respect des règles applicables, avec sérieux, transparence et contribution positive à l'écosystème économique local.</a:t>
-            </a:r>
-            <a:endParaRPr lang="en-US" sz="1500" dirty="0"/>
-          </a:p>
-        </p:txBody>
-      </p:sp>
-      <p:sp>
-        <p:nvSpPr>
-          <p:cNvPr id="9" name="Text 7"/>
-          <p:cNvSpPr/>
-          <p:nvPr/>
-        </p:nvSpPr>
-        <p:spPr>
-          <a:xfrm>
-            <a:off x="1005840" y="4160520"/>
-            <a:ext cx="5486400" cy="320040"/>
-          </a:xfrm>
-          <a:prstGeom prst="rect">
-            <a:avLst/>
-          </a:prstGeom>
-          <a:noFill/>
-          <a:ln/>
-        </p:spPr>
-        <p:txBody>
-          <a:bodyPr wrap="square" rtlCol="0" anchor="ctr"/>
-          <a:lstStyle/>
-          <a:p>
-            <a:pPr indent="0" marL="0">
-              <a:buNone/>
-            </a:pPr>
-            <a:r>
-              <a:rPr lang="en-US" sz="1800" b="1" dirty="0">
-                <a:solidFill>
-                  <a:srgbClr val="12151C"/>
-                </a:solidFill>
-                <a:latin typeface="Arial" pitchFamily="34" charset="0"/>
-                <a:ea typeface="Arial" pitchFamily="34" charset="-122"/>
-                <a:cs typeface="Arial" pitchFamily="34" charset="-120"/>
-              </a:rPr>
-              <a:t>Darren O'Sullivan</a:t>
-            </a:r>
-            <a:endParaRPr lang="en-US" sz="1800" dirty="0"/>
-          </a:p>
-        </p:txBody>
-      </p:sp>
-      <p:sp>
-        <p:nvSpPr>
-          <p:cNvPr id="10" name="Text 8"/>
-          <p:cNvSpPr/>
-          <p:nvPr/>
-        </p:nvSpPr>
-        <p:spPr>
-          <a:xfrm>
-            <a:off x="1005840" y="4526280"/>
-            <a:ext cx="7315200" cy="274320"/>
-          </a:xfrm>
-          <a:prstGeom prst="rect">
-            <a:avLst/>
-          </a:prstGeom>
-          <a:noFill/>
-          <a:ln/>
-        </p:spPr>
-        <p:txBody>
-          <a:bodyPr wrap="square" rtlCol="0" anchor="ctr"/>
-          <a:lstStyle/>
-          <a:p>
-            <a:pPr indent="0" marL="0">
-              <a:buNone/>
-            </a:pPr>
-            <a:r>
-              <a:rPr lang="en-US" sz="1300" dirty="0">
-                <a:solidFill>
-                  <a:srgbClr val="2A303C"/>
-                </a:solidFill>
-                <a:latin typeface="Arial" pitchFamily="34" charset="0"/>
-                <a:ea typeface="Arial" pitchFamily="34" charset="-122"/>
-                <a:cs typeface="Arial" pitchFamily="34" charset="-120"/>
-              </a:rPr>
-              <a:t>Fondateur — ODev    ·    darren@odev.studio</a:t>
-            </a:r>
-            <a:endParaRPr lang="en-US" sz="1300" dirty="0"/>
-          </a:p>
-        </p:txBody>
-      </p:sp>
-      <p:sp>
-        <p:nvSpPr>
-          <p:cNvPr id="11" name="Text 9"/>
+      <p:pic>
+        <p:nvPicPr>
+          <p:cNvPr id="11" name="Image 0" descr="C:\Users\samyd\Desktop\GTA RP\ODev\dossier-creation\assets\img\dynasty8.png">    </p:cNvPr>
+          <p:cNvPicPr>
+            <a:picLocks noChangeAspect="1"/>
+          </p:cNvPicPr>
+          <p:nvPr/>
+        </p:nvPicPr>
+        <p:blipFill>
+          <a:blip r:embed="rId4"/>
+          <a:stretch>
+            <a:fillRect/>
+          </a:stretch>
+        </p:blipFill>
+        <p:spPr>
+          <a:xfrm>
+            <a:off x="5806440" y="777240"/>
+            <a:ext cx="5669280" cy="4846320"/>
+          </a:xfrm>
+          <a:prstGeom prst="rect">
+            <a:avLst/>
+          </a:prstGeom>
+        </p:spPr>
+      </p:pic>
+      <p:sp>
+        <p:nvSpPr>
+          <p:cNvPr id="12" name="Text 9"/>
           <p:cNvSpPr/>
           <p:nvPr/>
         </p:nvSpPr>
@@ -5964,7 +8328,7 @@
       </p:sp>
       <p:sp>
         <p:nvSpPr>
-          <p:cNvPr id="12" name="Text 10"/>
+          <p:cNvPr id="13" name="Text 10"/>
           <p:cNvSpPr/>
           <p:nvPr/>
         </p:nvSpPr>
@@ -5995,7 +8359,479 @@
                 <a:ea typeface="Arial" pitchFamily="34" charset="-122"/>
                 <a:cs typeface="Arial" pitchFamily="34" charset="-120"/>
               </a:rPr>
-              <a:t>08 / 08</a:t>
+              <a:t>08 / 12</a:t>
+            </a:r>
+            <a:endParaRPr lang="en-US" sz="1000" dirty="0"/>
+          </a:p>
+        </p:txBody>
+      </p:sp>
+    </p:spTree>
+  </p:cSld>
+  <p:clrMapOvr>
+    <a:masterClrMapping/>
+  </p:clrMapOvr>
+</p:sld>
+</file>
+
+<file path=ppt/slides/slide9.xml><?xml version="1.0" encoding="utf-8"?>
+<p:sld xmlns:a="http://schemas.openxmlformats.org/drawingml/2006/main" xmlns:r="http://schemas.openxmlformats.org/officeDocument/2006/relationships" xmlns:p="http://schemas.openxmlformats.org/presentationml/2006/main">
+  <p:cSld name="Slide 9">
+    <p:spTree>
+      <p:nvGrpSpPr>
+        <p:cNvPr id="1" name=""/>
+        <p:cNvGrpSpPr/>
+        <p:nvPr/>
+      </p:nvGrpSpPr>
+      <p:grpSpPr>
+        <a:xfrm>
+          <a:off x="0" y="0"/>
+          <a:ext cx="0" cy="0"/>
+          <a:chOff x="0" y="0"/>
+          <a:chExt cx="0" cy="0"/>
+        </a:xfrm>
+      </p:grpSpPr>
+      <p:sp>
+        <p:nvSpPr>
+          <p:cNvPr id="2" name="Shape 0"/>
+          <p:cNvSpPr/>
+          <p:nvPr/>
+        </p:nvSpPr>
+        <p:spPr>
+          <a:xfrm>
+            <a:off x="0" y="0"/>
+            <a:ext cx="12191695" cy="6858000"/>
+          </a:xfrm>
+          <a:prstGeom prst="rect">
+            <a:avLst/>
+          </a:prstGeom>
+          <a:solidFill>
+            <a:srgbClr val="FFFFFF"/>
+          </a:solidFill>
+          <a:ln/>
+        </p:spPr>
+      </p:sp>
+      <p:sp>
+        <p:nvSpPr>
+          <p:cNvPr id="3" name="Text 1"/>
+          <p:cNvSpPr/>
+          <p:nvPr/>
+        </p:nvSpPr>
+        <p:spPr>
+          <a:xfrm>
+            <a:off x="640080" y="411480"/>
+            <a:ext cx="10972800" cy="274320"/>
+          </a:xfrm>
+          <a:prstGeom prst="rect">
+            <a:avLst/>
+          </a:prstGeom>
+          <a:noFill/>
+          <a:ln/>
+        </p:spPr>
+        <p:txBody>
+          <a:bodyPr wrap="square" rtlCol="0" anchor="ctr"/>
+          <a:lstStyle/>
+          <a:p>
+            <a:pPr indent="0" marL="0">
+              <a:buNone/>
+            </a:pPr>
+            <a:r>
+              <a:rPr lang="en-US" sz="1100" b="1" spc="400" kern="0" dirty="0">
+                <a:solidFill>
+                  <a:srgbClr val="E63312"/>
+                </a:solidFill>
+                <a:latin typeface="Arial" pitchFamily="34" charset="0"/>
+                <a:ea typeface="Arial" pitchFamily="34" charset="-122"/>
+                <a:cs typeface="Arial" pitchFamily="34" charset="-120"/>
+              </a:rPr>
+              <a:t>04 — RÉALISATION 03</a:t>
+            </a:r>
+            <a:endParaRPr lang="en-US" sz="1100" dirty="0"/>
+          </a:p>
+        </p:txBody>
+      </p:sp>
+      <p:sp>
+        <p:nvSpPr>
+          <p:cNvPr id="4" name="Text 2"/>
+          <p:cNvSpPr/>
+          <p:nvPr/>
+        </p:nvSpPr>
+        <p:spPr>
+          <a:xfrm>
+            <a:off x="640080" y="731520"/>
+            <a:ext cx="4754880" cy="457200"/>
+          </a:xfrm>
+          <a:prstGeom prst="rect">
+            <a:avLst/>
+          </a:prstGeom>
+          <a:noFill/>
+          <a:ln/>
+        </p:spPr>
+        <p:txBody>
+          <a:bodyPr wrap="square" rtlCol="0" anchor="ctr"/>
+          <a:lstStyle/>
+          <a:p>
+            <a:pPr indent="0" marL="0">
+              <a:buNone/>
+            </a:pPr>
+            <a:r>
+              <a:rPr lang="en-US" sz="2800" b="1" dirty="0">
+                <a:solidFill>
+                  <a:srgbClr val="12151C"/>
+                </a:solidFill>
+                <a:latin typeface="Arial" pitchFamily="34" charset="0"/>
+                <a:ea typeface="Arial" pitchFamily="34" charset="-122"/>
+                <a:cs typeface="Arial" pitchFamily="34" charset="-120"/>
+              </a:rPr>
+              <a:t>Cabinet Valet</a:t>
+            </a:r>
+            <a:endParaRPr lang="en-US" sz="2800" dirty="0"/>
+          </a:p>
+        </p:txBody>
+      </p:sp>
+      <p:sp>
+        <p:nvSpPr>
+          <p:cNvPr id="5" name="Text 3"/>
+          <p:cNvSpPr/>
+          <p:nvPr/>
+        </p:nvSpPr>
+        <p:spPr>
+          <a:xfrm>
+            <a:off x="640080" y="1188720"/>
+            <a:ext cx="4754880" cy="320040"/>
+          </a:xfrm>
+          <a:prstGeom prst="rect">
+            <a:avLst/>
+          </a:prstGeom>
+          <a:noFill/>
+          <a:ln/>
+        </p:spPr>
+        <p:txBody>
+          <a:bodyPr wrap="square" rtlCol="0" anchor="ctr"/>
+          <a:lstStyle/>
+          <a:p>
+            <a:pPr indent="0" marL="0">
+              <a:buNone/>
+            </a:pPr>
+            <a:r>
+              <a:rPr lang="en-US" sz="1300" b="1" dirty="0">
+                <a:solidFill>
+                  <a:srgbClr val="C8F542"/>
+                </a:solidFill>
+                <a:latin typeface="Arial" pitchFamily="34" charset="0"/>
+                <a:ea typeface="Arial" pitchFamily="34" charset="-122"/>
+                <a:cs typeface="Arial" pitchFamily="34" charset="-120"/>
+              </a:rPr>
+              <a:t>Site cabinet professionnel</a:t>
+            </a:r>
+            <a:endParaRPr lang="en-US" sz="1300" dirty="0"/>
+          </a:p>
+        </p:txBody>
+      </p:sp>
+      <p:sp>
+        <p:nvSpPr>
+          <p:cNvPr id="6" name="Text 4"/>
+          <p:cNvSpPr/>
+          <p:nvPr/>
+        </p:nvSpPr>
+        <p:spPr>
+          <a:xfrm>
+            <a:off x="640080" y="1645920"/>
+            <a:ext cx="4754880" cy="1097280"/>
+          </a:xfrm>
+          <a:prstGeom prst="rect">
+            <a:avLst/>
+          </a:prstGeom>
+          <a:noFill/>
+          <a:ln/>
+        </p:spPr>
+        <p:txBody>
+          <a:bodyPr wrap="square" rtlCol="0" anchor="ctr"/>
+          <a:lstStyle/>
+          <a:p>
+            <a:pPr indent="0" marL="0">
+              <a:buNone/>
+            </a:pPr>
+            <a:r>
+              <a:rPr lang="en-US" sz="1400" dirty="0">
+                <a:solidFill>
+                  <a:srgbClr val="2A303C"/>
+                </a:solidFill>
+                <a:latin typeface="Arial" pitchFamily="34" charset="0"/>
+                <a:ea typeface="Arial" pitchFamily="34" charset="-122"/>
+                <a:cs typeface="Arial" pitchFamily="34" charset="-120"/>
+              </a:rPr>
+              <a:t>Identité premium, expertises, prise de rendez-vous et présence institutionnelle.</a:t>
+            </a:r>
+            <a:endParaRPr lang="en-US" sz="1400" dirty="0"/>
+          </a:p>
+        </p:txBody>
+      </p:sp>
+      <p:sp>
+        <p:nvSpPr>
+          <p:cNvPr id="7" name="Text 5">
+            <a:hlinkClick r:id="rId1" tooltip=""/>
+          </p:cNvPr>
+          <p:cNvSpPr/>
+          <p:nvPr/>
+        </p:nvSpPr>
+        <p:spPr>
+          <a:xfrm>
+            <a:off x="640080" y="2926080"/>
+            <a:ext cx="4754880" cy="365760"/>
+          </a:xfrm>
+          <a:prstGeom prst="rect">
+            <a:avLst/>
+          </a:prstGeom>
+          <a:noFill/>
+          <a:ln/>
+        </p:spPr>
+        <p:txBody>
+          <a:bodyPr wrap="square" rtlCol="0" anchor="ctr"/>
+          <a:lstStyle/>
+          <a:p>
+            <a:pPr indent="0" marL="0">
+              <a:buNone/>
+            </a:pPr>
+            <a:r>
+              <a:rPr lang="en-US" sz="1400" b="1" u="sng" dirty="0">
+                <a:solidFill>
+                  <a:srgbClr val="E63312"/>
+                </a:solidFill>
+                <a:latin typeface="Arial" pitchFamily="34" charset="0"/>
+                <a:ea typeface="Arial" pitchFamily="34" charset="-122"/>
+                <a:cs typeface="Arial" pitchFamily="34" charset="-120"/>
+                <a:hlinkClick r:id="rId1" invalidUrl="" action="" tgtFrame="" tooltip="" history="1" highlightClick="0" endSnd="0">
+                  <a:extLst>
+                    <a:ext uri="{A12FA001-AC4F-418D-AE19-62706E023703}">
+                      <ahyp:hlinkClr xmlns:ahyp="http://schemas.microsoft.com/office/drawing/2018/hyperlinkcolor" val="tx"/>
+                    </a:ext>
+                  </a:extLst>
+                </a:hlinkClick>
+              </a:rPr>
+              <a:t>Voir le site en ligne →</a:t>
+            </a:r>
+            <a:endParaRPr lang="en-US" sz="1400" dirty="0"/>
+          </a:p>
+        </p:txBody>
+      </p:sp>
+      <p:sp>
+        <p:nvSpPr>
+          <p:cNvPr id="8" name="Text 6">
+            <a:hlinkClick r:id="rId2" tooltip=""/>
+          </p:cNvPr>
+          <p:cNvSpPr/>
+          <p:nvPr/>
+        </p:nvSpPr>
+        <p:spPr>
+          <a:xfrm>
+            <a:off x="640080" y="3246120"/>
+            <a:ext cx="4754880" cy="320040"/>
+          </a:xfrm>
+          <a:prstGeom prst="rect">
+            <a:avLst/>
+          </a:prstGeom>
+          <a:noFill/>
+          <a:ln/>
+        </p:spPr>
+        <p:txBody>
+          <a:bodyPr wrap="square" rtlCol="0" anchor="ctr"/>
+          <a:lstStyle/>
+          <a:p>
+            <a:pPr indent="0" marL="0">
+              <a:buNone/>
+            </a:pPr>
+            <a:r>
+              <a:rPr lang="en-US" sz="1200" u="sng" dirty="0">
+                <a:solidFill>
+                  <a:srgbClr val="2A303C"/>
+                </a:solidFill>
+                <a:latin typeface="Arial" pitchFamily="34" charset="0"/>
+                <a:ea typeface="Arial" pitchFamily="34" charset="-122"/>
+                <a:cs typeface="Arial" pitchFamily="34" charset="-120"/>
+                <a:hlinkClick r:id="rId2" invalidUrl="" action="" tgtFrame="" tooltip="" history="1" highlightClick="0" endSnd="0">
+                  <a:extLst>
+                    <a:ext uri="{A12FA001-AC4F-418D-AE19-62706E023703}">
+                      <ahyp:hlinkClr xmlns:ahyp="http://schemas.microsoft.com/office/drawing/2018/hyperlinkcolor" val="tx"/>
+                    </a:ext>
+                  </a:extLst>
+                </a:hlinkClick>
+              </a:rPr>
+              <a:t>cabinet-valet.kodyalabs.fr</a:t>
+            </a:r>
+            <a:endParaRPr lang="en-US" sz="1200" dirty="0"/>
+          </a:p>
+        </p:txBody>
+      </p:sp>
+      <p:sp>
+        <p:nvSpPr>
+          <p:cNvPr id="9" name="Text 7">
+            <a:hlinkClick r:id="rId3" tooltip=""/>
+          </p:cNvPr>
+          <p:cNvSpPr/>
+          <p:nvPr/>
+        </p:nvSpPr>
+        <p:spPr>
+          <a:xfrm>
+            <a:off x="640080" y="5303520"/>
+            <a:ext cx="4754880" cy="320040"/>
+          </a:xfrm>
+          <a:prstGeom prst="rect">
+            <a:avLst/>
+          </a:prstGeom>
+          <a:noFill/>
+          <a:ln/>
+        </p:spPr>
+        <p:txBody>
+          <a:bodyPr wrap="square" rtlCol="0" anchor="ctr"/>
+          <a:lstStyle/>
+          <a:p>
+            <a:pPr indent="0" marL="0">
+              <a:buNone/>
+            </a:pPr>
+            <a:r>
+              <a:rPr lang="en-US" sz="1100" u="sng" dirty="0">
+                <a:solidFill>
+                  <a:srgbClr val="1A7A72"/>
+                </a:solidFill>
+                <a:latin typeface="Arial" pitchFamily="34" charset="0"/>
+                <a:ea typeface="Arial" pitchFamily="34" charset="-122"/>
+                <a:cs typeface="Arial" pitchFamily="34" charset="-120"/>
+                <a:hlinkClick r:id="rId3" invalidUrl="" action="" tgtFrame="" tooltip="" history="1" highlightClick="0" endSnd="0">
+                  <a:extLst>
+                    <a:ext uri="{A12FA001-AC4F-418D-AE19-62706E023703}">
+                      <ahyp:hlinkClr xmlns:ahyp="http://schemas.microsoft.com/office/drawing/2018/hyperlinkcolor" val="tx"/>
+                    </a:ext>
+                  </a:extLst>
+                </a:hlinkClick>
+              </a:rPr>
+              <a:t>https://cabinet-valet.kodyalabs.fr/</a:t>
+            </a:r>
+            <a:endParaRPr lang="en-US" sz="1100" dirty="0"/>
+          </a:p>
+        </p:txBody>
+      </p:sp>
+      <p:sp>
+        <p:nvSpPr>
+          <p:cNvPr id="10" name="Shape 8"/>
+          <p:cNvSpPr/>
+          <p:nvPr/>
+        </p:nvSpPr>
+        <p:spPr>
+          <a:xfrm>
+            <a:off x="5669280" y="640080"/>
+            <a:ext cx="5943600" cy="5120640"/>
+          </a:xfrm>
+          <a:prstGeom prst="rect">
+            <a:avLst/>
+          </a:prstGeom>
+          <a:solidFill>
+            <a:srgbClr val="E9ECF1"/>
+          </a:solidFill>
+          <a:ln w="12700">
+            <a:solidFill>
+              <a:srgbClr val="C8CED8"/>
+            </a:solidFill>
+            <a:prstDash val="solid"/>
+          </a:ln>
+        </p:spPr>
+      </p:sp>
+      <p:pic>
+        <p:nvPicPr>
+          <p:cNvPr id="11" name="Image 0" descr="C:\Users\samyd\Desktop\GTA RP\ODev\dossier-creation\assets\img\cabinet-valet.png">    </p:cNvPr>
+          <p:cNvPicPr>
+            <a:picLocks noChangeAspect="1"/>
+          </p:cNvPicPr>
+          <p:nvPr/>
+        </p:nvPicPr>
+        <p:blipFill>
+          <a:blip r:embed="rId4"/>
+          <a:stretch>
+            <a:fillRect/>
+          </a:stretch>
+        </p:blipFill>
+        <p:spPr>
+          <a:xfrm>
+            <a:off x="5806440" y="777240"/>
+            <a:ext cx="5669280" cy="4846320"/>
+          </a:xfrm>
+          <a:prstGeom prst="rect">
+            <a:avLst/>
+          </a:prstGeom>
+        </p:spPr>
+      </p:pic>
+      <p:sp>
+        <p:nvSpPr>
+          <p:cNvPr id="12" name="Text 9"/>
+          <p:cNvSpPr/>
+          <p:nvPr/>
+        </p:nvSpPr>
+        <p:spPr>
+          <a:xfrm>
+            <a:off x="548640" y="6446520"/>
+            <a:ext cx="9144000" cy="274320"/>
+          </a:xfrm>
+          <a:prstGeom prst="rect">
+            <a:avLst/>
+          </a:prstGeom>
+          <a:noFill/>
+          <a:ln/>
+        </p:spPr>
+        <p:txBody>
+          <a:bodyPr wrap="square" rtlCol="0" anchor="ctr"/>
+          <a:lstStyle/>
+          <a:p>
+            <a:pPr indent="0" marL="0">
+              <a:buNone/>
+            </a:pPr>
+            <a:r>
+              <a:rPr lang="en-US" sz="1000" dirty="0">
+                <a:solidFill>
+                  <a:srgbClr val="2A303C"/>
+                </a:solidFill>
+                <a:latin typeface="Arial" pitchFamily="34" charset="0"/>
+                <a:ea typeface="Arial" pitchFamily="34" charset="-122"/>
+                <a:cs typeface="Arial" pitchFamily="34" charset="-120"/>
+              </a:rPr>
+              <a:t>ODev — Dossier de création · ODEV-2026-01</a:t>
+            </a:r>
+            <a:endParaRPr lang="en-US" sz="1000" dirty="0"/>
+          </a:p>
+        </p:txBody>
+      </p:sp>
+      <p:sp>
+        <p:nvSpPr>
+          <p:cNvPr id="13" name="Text 10"/>
+          <p:cNvSpPr/>
+          <p:nvPr/>
+        </p:nvSpPr>
+        <p:spPr>
+          <a:xfrm>
+            <a:off x="10241280" y="6446520"/>
+            <a:ext cx="1371600" cy="274320"/>
+          </a:xfrm>
+          <a:prstGeom prst="rect">
+            <a:avLst/>
+          </a:prstGeom>
+          <a:noFill/>
+          <a:ln/>
+        </p:spPr>
+        <p:txBody>
+          <a:bodyPr wrap="square" rtlCol="0" anchor="ctr"/>
+          <a:lstStyle/>
+          <a:p>
+            <a:pPr algn="r" indent="0" marL="0">
+              <a:buNone/>
+            </a:pPr>
+            <a:r>
+              <a:rPr lang="en-US" sz="1000" dirty="0">
+                <a:solidFill>
+                  <a:srgbClr val="2A303C"/>
+                </a:solidFill>
+                <a:latin typeface="Arial" pitchFamily="34" charset="0"/>
+                <a:ea typeface="Arial" pitchFamily="34" charset="-122"/>
+                <a:cs typeface="Arial" pitchFamily="34" charset="-120"/>
+              </a:rPr>
+              <a:t>09 / 12</a:t>
             </a:r>
             <a:endParaRPr lang="en-US" sz="1000" dirty="0"/>
           </a:p>
